--- a/.presentation-build/student-test/candidate.pptx
+++ b/.presentation-build/student-test/candidate.pptx
@@ -2,18 +2,20 @@
 <file path=ppt/presentation.xml><?xml version="1.0" encoding="utf-8"?>
 <p:presentation xmlns:p="http://schemas.openxmlformats.org/presentationml/2006/main">
   <p:sldMasterIdLst>
-    <p:sldMasterId xmlns:r="http://schemas.openxmlformats.org/officeDocument/2006/relationships" id="2147483648" r:id="R9b6c6db18ce644f7"/>
+    <p:sldMasterId xmlns:r="http://schemas.openxmlformats.org/officeDocument/2006/relationships" id="2147483648" r:id="Rd06f898683184d71"/>
   </p:sldMasterIdLst>
   <p:notesMasterIdLst>
-    <p:notesMasterId xmlns:r="http://schemas.openxmlformats.org/officeDocument/2006/relationships" r:id="Rcc69266120864ebc"/>
+    <p:notesMasterId xmlns:r="http://schemas.openxmlformats.org/officeDocument/2006/relationships" r:id="R1276c365da2c4712"/>
   </p:notesMasterIdLst>
   <p:sldIdLst>
-    <p:sldId xmlns:r="http://schemas.openxmlformats.org/officeDocument/2006/relationships" id="256" r:id="R92c579a41ab849a0"/>
-    <p:sldId xmlns:r="http://schemas.openxmlformats.org/officeDocument/2006/relationships" id="257" r:id="R681aa1793d944451"/>
-    <p:sldId xmlns:r="http://schemas.openxmlformats.org/officeDocument/2006/relationships" id="258" r:id="R6636962729a6497f"/>
-    <p:sldId xmlns:r="http://schemas.openxmlformats.org/officeDocument/2006/relationships" id="259" r:id="R3f19049f99b14872"/>
-    <p:sldId xmlns:r="http://schemas.openxmlformats.org/officeDocument/2006/relationships" id="260" r:id="R3c806ecb70d048ea"/>
-    <p:sldId xmlns:r="http://schemas.openxmlformats.org/officeDocument/2006/relationships" id="261" r:id="R82b36883417e4709"/>
+    <p:sldId xmlns:r="http://schemas.openxmlformats.org/officeDocument/2006/relationships" id="256" r:id="Raafca4ab941842fd"/>
+    <p:sldId xmlns:r="http://schemas.openxmlformats.org/officeDocument/2006/relationships" id="257" r:id="Rd3c7c856869049cc"/>
+    <p:sldId xmlns:r="http://schemas.openxmlformats.org/officeDocument/2006/relationships" id="258" r:id="Rc3487b2af51641a0"/>
+    <p:sldId xmlns:r="http://schemas.openxmlformats.org/officeDocument/2006/relationships" id="259" r:id="R99c0c8a5a1d141ad"/>
+    <p:sldId xmlns:r="http://schemas.openxmlformats.org/officeDocument/2006/relationships" id="260" r:id="R315dbfad37fd4e42"/>
+    <p:sldId xmlns:r="http://schemas.openxmlformats.org/officeDocument/2006/relationships" id="261" r:id="Rf225dca3644240b4"/>
+    <p:sldId xmlns:r="http://schemas.openxmlformats.org/officeDocument/2006/relationships" id="262" r:id="R1c5e48a1b4994c9f"/>
+    <p:sldId xmlns:r="http://schemas.openxmlformats.org/officeDocument/2006/relationships" id="263" r:id="Rcaa88293bc6f46a0"/>
   </p:sldIdLst>
   <p:sldSz cx="12192000" cy="6858000"/>
   <p:notesSz cx="6858000" cy="9144000"/>
@@ -581,11 +583,7 @@
         <p:txBody>
           <a:bodyPr xmlns:a="http://schemas.openxmlformats.org/drawingml/2006/main"/>
           <a:lstStyle xmlns:a="http://schemas.openxmlformats.org/drawingml/2006/main"/>
-          <a:p xmlns:a="http://schemas.openxmlformats.org/drawingml/2006/main">
-            <a:r>
-              <a:t>Аппын зураг: хэрэглэгчийн өгсөн StorePoster/iOS 7.png. Зураг нь өмнөх хувилбарын дэлгэц тул шинэ хувилбарт зарим харагдац өөр байж болно.</a:t>
-            </a:r>
-          </a:p>
+          <a:p xmlns:a="http://schemas.openxmlformats.org/drawingml/2006/main"/>
         </p:txBody>
       </p:sp>
       <p:sp>
@@ -653,7 +651,7 @@
           <a:lstStyle xmlns:a="http://schemas.openxmlformats.org/drawingml/2006/main"/>
           <a:p xmlns:a="http://schemas.openxmlformats.org/drawingml/2006/main">
             <a:r>
-              <a:t>Аппын зураг: хэрэглэгчийн өгсөн StorePoster/iOS 3.png. Зураг нь өмнөх хувилбарын дэлгэц тул шинэ хувилбарт зарим харагдац өөр байж болно.</a:t>
+              <a:t>Аппын зураг: хэрэглэгчийн өгсөн StorePoster/iOS 7.png. Зураг нь өмнөх хувилбарын дэлгэц тул шинэ хувилбарт зарим харагдац өөр байж болно.</a:t>
             </a:r>
           </a:p>
         </p:txBody>
@@ -723,7 +721,7 @@
           <a:lstStyle xmlns:a="http://schemas.openxmlformats.org/drawingml/2006/main"/>
           <a:p xmlns:a="http://schemas.openxmlformats.org/drawingml/2006/main">
             <a:r>
-              <a:t>Аппын зураг: хэрэглэгчийн өгсөн StorePoster/iOS 5.png. Зураг нь өмнөх хувилбарын дэлгэц тул шинэ хувилбарт зарим харагдац өөр байж болно.</a:t>
+              <a:t>Аппын зураг: хэрэглэгчийн өгсөн StorePoster/iOS 3.png. Зураг нь өмнөх хувилбарын дэлгэц тул шинэ хувилбарт зарим харагдац өөр байж болно.</a:t>
             </a:r>
           </a:p>
         </p:txBody>
@@ -791,6 +789,142 @@
         <p:txBody>
           <a:bodyPr xmlns:a="http://schemas.openxmlformats.org/drawingml/2006/main"/>
           <a:lstStyle xmlns:a="http://schemas.openxmlformats.org/drawingml/2006/main"/>
+          <a:p xmlns:a="http://schemas.openxmlformats.org/drawingml/2006/main">
+            <a:r>
+              <a:t>Аппын зураг: хэрэглэгчийн өгсөн StorePoster/iOS 5.png. Зураг нь өмнөх хувилбарын дэлгэц тул шинэ хувилбарт зарим харагдац өөр байж болно.</a:t>
+            </a:r>
+          </a:p>
+        </p:txBody>
+      </p:sp>
+      <p:sp>
+        <p:nvSpPr>
+          <p:cNvPr id="4" name="Slide Number Placeholder 3"/>
+          <p:cNvSpPr>
+            <a:spLocks xmlns:a="http://schemas.openxmlformats.org/drawingml/2006/main" noGrp="1"/>
+          </p:cNvSpPr>
+          <p:nvPr>
+            <p:ph type="sldNum" idx="5"/>
+          </p:nvPr>
+        </p:nvSpPr>
+        <p:spPr/>
+        <p:txBody>
+          <a:bodyPr xmlns:a="http://schemas.openxmlformats.org/drawingml/2006/main"/>
+          <a:lstStyle xmlns:a="http://schemas.openxmlformats.org/drawingml/2006/main"/>
+          <a:p xmlns:a="http://schemas.openxmlformats.org/drawingml/2006/main"/>
+        </p:txBody>
+      </p:sp>
+    </p:spTree>
+  </p:cSld>
+  <p:clrMapOvr>
+    <a:masterClrMapping xmlns:a="http://schemas.openxmlformats.org/drawingml/2006/main"/>
+  </p:clrMapOvr>
+</p:notes>
+</file>
+
+<file path=ppt/notesSlides/notesSlide7.xml><?xml version="1.0" encoding="utf-8"?>
+<p:notes xmlns:p="http://schemas.openxmlformats.org/presentationml/2006/main">
+  <p:cSld>
+    <p:spTree>
+      <p:nvGrpSpPr>
+        <p:cNvPr id="1" name=""/>
+        <p:cNvGrpSpPr/>
+        <p:nvPr/>
+      </p:nvGrpSpPr>
+      <p:grpSpPr>
+        <a:xfrm xmlns:a="http://schemas.openxmlformats.org/drawingml/2006/main"/>
+      </p:grpSpPr>
+      <p:sp>
+        <p:nvSpPr>
+          <p:cNvPr id="2" name="Slide Image Placeholder 1"/>
+          <p:cNvSpPr>
+            <a:spLocks xmlns:a="http://schemas.openxmlformats.org/drawingml/2006/main" noGrp="1"/>
+          </p:cNvSpPr>
+          <p:nvPr>
+            <p:ph type="sldImg" idx="0"/>
+          </p:nvPr>
+        </p:nvSpPr>
+        <p:spPr/>
+      </p:sp>
+      <p:sp>
+        <p:nvSpPr>
+          <p:cNvPr id="3" name="Notes Placeholder 2"/>
+          <p:cNvSpPr>
+            <a:spLocks xmlns:a="http://schemas.openxmlformats.org/drawingml/2006/main" noGrp="1"/>
+          </p:cNvSpPr>
+          <p:nvPr>
+            <p:ph type="body" idx="1"/>
+          </p:nvPr>
+        </p:nvSpPr>
+        <p:spPr/>
+        <p:txBody>
+          <a:bodyPr xmlns:a="http://schemas.openxmlformats.org/drawingml/2006/main"/>
+          <a:lstStyle xmlns:a="http://schemas.openxmlformats.org/drawingml/2006/main"/>
+          <a:p xmlns:a="http://schemas.openxmlformats.org/drawingml/2006/main"/>
+        </p:txBody>
+      </p:sp>
+      <p:sp>
+        <p:nvSpPr>
+          <p:cNvPr id="4" name="Slide Number Placeholder 3"/>
+          <p:cNvSpPr>
+            <a:spLocks xmlns:a="http://schemas.openxmlformats.org/drawingml/2006/main" noGrp="1"/>
+          </p:cNvSpPr>
+          <p:nvPr>
+            <p:ph type="sldNum" idx="5"/>
+          </p:nvPr>
+        </p:nvSpPr>
+        <p:spPr/>
+        <p:txBody>
+          <a:bodyPr xmlns:a="http://schemas.openxmlformats.org/drawingml/2006/main"/>
+          <a:lstStyle xmlns:a="http://schemas.openxmlformats.org/drawingml/2006/main"/>
+          <a:p xmlns:a="http://schemas.openxmlformats.org/drawingml/2006/main"/>
+        </p:txBody>
+      </p:sp>
+    </p:spTree>
+  </p:cSld>
+  <p:clrMapOvr>
+    <a:masterClrMapping xmlns:a="http://schemas.openxmlformats.org/drawingml/2006/main"/>
+  </p:clrMapOvr>
+</p:notes>
+</file>
+
+<file path=ppt/notesSlides/notesSlide8.xml><?xml version="1.0" encoding="utf-8"?>
+<p:notes xmlns:p="http://schemas.openxmlformats.org/presentationml/2006/main">
+  <p:cSld>
+    <p:spTree>
+      <p:nvGrpSpPr>
+        <p:cNvPr id="1" name=""/>
+        <p:cNvGrpSpPr/>
+        <p:nvPr/>
+      </p:nvGrpSpPr>
+      <p:grpSpPr>
+        <a:xfrm xmlns:a="http://schemas.openxmlformats.org/drawingml/2006/main"/>
+      </p:grpSpPr>
+      <p:sp>
+        <p:nvSpPr>
+          <p:cNvPr id="2" name="Slide Image Placeholder 1"/>
+          <p:cNvSpPr>
+            <a:spLocks xmlns:a="http://schemas.openxmlformats.org/drawingml/2006/main" noGrp="1"/>
+          </p:cNvSpPr>
+          <p:nvPr>
+            <p:ph type="sldImg" idx="0"/>
+          </p:nvPr>
+        </p:nvSpPr>
+        <p:spPr/>
+      </p:sp>
+      <p:sp>
+        <p:nvSpPr>
+          <p:cNvPr id="3" name="Notes Placeholder 2"/>
+          <p:cNvSpPr>
+            <a:spLocks xmlns:a="http://schemas.openxmlformats.org/drawingml/2006/main" noGrp="1"/>
+          </p:cNvSpPr>
+          <p:nvPr>
+            <p:ph type="body" idx="1"/>
+          </p:nvPr>
+        </p:nvSpPr>
+        <p:spPr/>
+        <p:txBody>
+          <a:bodyPr xmlns:a="http://schemas.openxmlformats.org/drawingml/2006/main"/>
+          <a:lstStyle xmlns:a="http://schemas.openxmlformats.org/drawingml/2006/main"/>
           <a:p xmlns:a="http://schemas.openxmlformats.org/drawingml/2006/main"/>
         </p:txBody>
       </p:sp>
@@ -836,7 +970,7 @@
           <p:cNvPr id="3" name="Title">
             <a:extLst xmlns:a="http://schemas.openxmlformats.org/drawingml/2006/main">
               <a:ext uri="{FF2B5EF4-FFF2-40B4-BE49-F238E27FC236}">
-                <a16:creationId xmlns:a16="http://schemas.microsoft.com/office/drawing/2014/main" id="{3C9EF1AA-A19F-4F2E-AFFD-138C217AC642}"/>
+                <a16:creationId xmlns:a16="http://schemas.microsoft.com/office/drawing/2014/main" id="{E89CA6B4-8337-498C-91D7-D2264B5B630B}"/>
               </a:ext>
             </a:extLst>
           </p:cNvPr>
@@ -993,7 +1127,7 @@
           <p:cNvPr id="2" name="Subtitle">
             <a:extLst xmlns:a="http://schemas.openxmlformats.org/drawingml/2006/main">
               <a:ext uri="{FF2B5EF4-FFF2-40B4-BE49-F238E27FC236}">
-                <a16:creationId xmlns:a16="http://schemas.microsoft.com/office/drawing/2014/main" id="{08CD21F4-AAE9-4703-8D6A-F23F0CE57DFD}"/>
+                <a16:creationId xmlns:a16="http://schemas.microsoft.com/office/drawing/2014/main" id="{04DC9138-0BCE-45D3-BAB5-C8107F6B4D4E}"/>
               </a:ext>
             </a:extLst>
           </p:cNvPr>
@@ -1167,7 +1301,7 @@
           <p:cNvPr id="2" name="Section title">
             <a:extLst xmlns:a="http://schemas.openxmlformats.org/drawingml/2006/main">
               <a:ext uri="{FF2B5EF4-FFF2-40B4-BE49-F238E27FC236}">
-                <a16:creationId xmlns:a16="http://schemas.microsoft.com/office/drawing/2014/main" id="{9B0DA373-37D2-40D3-B02C-5D228D9C2029}"/>
+                <a16:creationId xmlns:a16="http://schemas.microsoft.com/office/drawing/2014/main" id="{B2DDB104-BFF0-4932-9F0A-7F02B3CAD13E}"/>
               </a:ext>
             </a:extLst>
           </p:cNvPr>
@@ -1341,7 +1475,7 @@
           <p:cNvPr id="3" name="Title">
             <a:extLst xmlns:a="http://schemas.openxmlformats.org/drawingml/2006/main">
               <a:ext uri="{FF2B5EF4-FFF2-40B4-BE49-F238E27FC236}">
-                <a16:creationId xmlns:a16="http://schemas.microsoft.com/office/drawing/2014/main" id="{3704D11B-5DA8-4B6F-AD71-D4C560E61EDB}"/>
+                <a16:creationId xmlns:a16="http://schemas.microsoft.com/office/drawing/2014/main" id="{CEA525FD-A845-4547-A78E-9494A7C35CDA}"/>
               </a:ext>
             </a:extLst>
           </p:cNvPr>
@@ -1498,7 +1632,7 @@
           <p:cNvPr id="2" name="Body">
             <a:extLst xmlns:a="http://schemas.openxmlformats.org/drawingml/2006/main">
               <a:ext uri="{FF2B5EF4-FFF2-40B4-BE49-F238E27FC236}">
-                <a16:creationId xmlns:a16="http://schemas.microsoft.com/office/drawing/2014/main" id="{6E74A86E-C1E3-4743-BEB1-4C882F29CE8E}"/>
+                <a16:creationId xmlns:a16="http://schemas.microsoft.com/office/drawing/2014/main" id="{22C410EB-BA46-4975-A9F9-F4DBAB6D3066}"/>
               </a:ext>
             </a:extLst>
           </p:cNvPr>
@@ -1672,7 +1806,7 @@
           <p:cNvPr id="4" name="Title">
             <a:extLst xmlns:a="http://schemas.openxmlformats.org/drawingml/2006/main">
               <a:ext uri="{FF2B5EF4-FFF2-40B4-BE49-F238E27FC236}">
-                <a16:creationId xmlns:a16="http://schemas.microsoft.com/office/drawing/2014/main" id="{249C391A-62F5-4992-82B6-A69ED2E1AAB6}"/>
+                <a16:creationId xmlns:a16="http://schemas.microsoft.com/office/drawing/2014/main" id="{72FCC2E4-EC38-4F88-84AA-BBBCE80DEB35}"/>
               </a:ext>
             </a:extLst>
           </p:cNvPr>
@@ -1829,7 +1963,7 @@
           <p:cNvPr id="2" name="Left column">
             <a:extLst xmlns:a="http://schemas.openxmlformats.org/drawingml/2006/main">
               <a:ext uri="{FF2B5EF4-FFF2-40B4-BE49-F238E27FC236}">
-                <a16:creationId xmlns:a16="http://schemas.microsoft.com/office/drawing/2014/main" id="{8547E7FC-6B18-418F-8D3E-992DBC208876}"/>
+                <a16:creationId xmlns:a16="http://schemas.microsoft.com/office/drawing/2014/main" id="{C43A2501-889C-4DB7-9ECB-87A69D5D8959}"/>
               </a:ext>
             </a:extLst>
           </p:cNvPr>
@@ -1986,7 +2120,7 @@
           <p:cNvPr id="3" name="Right column">
             <a:extLst xmlns:a="http://schemas.openxmlformats.org/drawingml/2006/main">
               <a:ext uri="{FF2B5EF4-FFF2-40B4-BE49-F238E27FC236}">
-                <a16:creationId xmlns:a16="http://schemas.microsoft.com/office/drawing/2014/main" id="{4A9DDE8D-9E1B-42EC-8088-DC16DEB99E06}"/>
+                <a16:creationId xmlns:a16="http://schemas.microsoft.com/office/drawing/2014/main" id="{B14A7D04-A470-41FC-BF9C-9F1CDFFAEEA7}"/>
               </a:ext>
             </a:extLst>
           </p:cNvPr>
@@ -2160,7 +2294,7 @@
           <p:cNvPr id="3" name="Title">
             <a:extLst xmlns:a="http://schemas.openxmlformats.org/drawingml/2006/main">
               <a:ext uri="{FF2B5EF4-FFF2-40B4-BE49-F238E27FC236}">
-                <a16:creationId xmlns:a16="http://schemas.microsoft.com/office/drawing/2014/main" id="{BE9E1337-0FAB-421D-81F4-55F92EAAB540}"/>
+                <a16:creationId xmlns:a16="http://schemas.microsoft.com/office/drawing/2014/main" id="{91919A6A-3469-4C37-ADA6-2EF26E761BC7}"/>
               </a:ext>
             </a:extLst>
           </p:cNvPr>
@@ -2317,7 +2451,7 @@
           <p:cNvPr id="2" name="Left column">
             <a:extLst xmlns:a="http://schemas.openxmlformats.org/drawingml/2006/main">
               <a:ext uri="{FF2B5EF4-FFF2-40B4-BE49-F238E27FC236}">
-                <a16:creationId xmlns:a16="http://schemas.microsoft.com/office/drawing/2014/main" id="{CBCAABAB-7D94-4CEB-AB6F-C7AE426A10EE}"/>
+                <a16:creationId xmlns:a16="http://schemas.microsoft.com/office/drawing/2014/main" id="{E97F7EB0-2BE0-4751-ADD4-A9D9330BFC52}"/>
               </a:ext>
             </a:extLst>
           </p:cNvPr>
@@ -2512,12 +2646,12 @@
   </p:cSld>
   <p:clrMap bg1="lt1" tx1="dk1" bg2="lt2" tx2="dk2" accent1="accent1" accent2="accent2" accent3="accent3" accent4="accent4" accent5="accent5" accent6="accent6" hlink="hlink" folHlink="folHlink"/>
   <p:sldLayoutIdLst>
-    <p:sldLayoutId xmlns:r="http://schemas.openxmlformats.org/officeDocument/2006/relationships" id="2147483649" r:id="R426b7855c2de41a6"/>
-    <p:sldLayoutId xmlns:r="http://schemas.openxmlformats.org/officeDocument/2006/relationships" id="2147483650" r:id="Ra7800240f5eb418b"/>
-    <p:sldLayoutId xmlns:r="http://schemas.openxmlformats.org/officeDocument/2006/relationships" id="2147483651" r:id="Rdcd1fc1e2ba14f13"/>
-    <p:sldLayoutId xmlns:r="http://schemas.openxmlformats.org/officeDocument/2006/relationships" id="2147483652" r:id="R87419f0974b744ab"/>
-    <p:sldLayoutId xmlns:r="http://schemas.openxmlformats.org/officeDocument/2006/relationships" id="2147483653" r:id="R00d506f8e57f477b"/>
-    <p:sldLayoutId xmlns:r="http://schemas.openxmlformats.org/officeDocument/2006/relationships" id="2147483654" r:id="Rfb65ec56c154451e"/>
+    <p:sldLayoutId xmlns:r="http://schemas.openxmlformats.org/officeDocument/2006/relationships" id="2147483649" r:id="R427f7222076b4356"/>
+    <p:sldLayoutId xmlns:r="http://schemas.openxmlformats.org/officeDocument/2006/relationships" id="2147483650" r:id="R684b281fe84d4a78"/>
+    <p:sldLayoutId xmlns:r="http://schemas.openxmlformats.org/officeDocument/2006/relationships" id="2147483651" r:id="R69730cdc48c14f51"/>
+    <p:sldLayoutId xmlns:r="http://schemas.openxmlformats.org/officeDocument/2006/relationships" id="2147483652" r:id="Re8188de79d47455d"/>
+    <p:sldLayoutId xmlns:r="http://schemas.openxmlformats.org/officeDocument/2006/relationships" id="2147483653" r:id="R9ebb7691a26749a3"/>
+    <p:sldLayoutId xmlns:r="http://schemas.openxmlformats.org/officeDocument/2006/relationships" id="2147483654" r:id="R07b98290a3354275"/>
   </p:sldLayoutIdLst>
   <p:txStyles>
     <p:titleStyle>
@@ -3068,7 +3202,7 @@
           <p:cNvPr id="6" name="">
             <a:extLst xmlns:a="http://schemas.openxmlformats.org/drawingml/2006/main">
               <a:ext uri="{FF2B5EF4-FFF2-40B4-BE49-F238E27FC236}">
-                <a16:creationId xmlns:a16="http://schemas.microsoft.com/office/drawing/2014/main" id="{B0CE3E8D-419B-47C8-A09F-4BCA9640CADA}"/>
+                <a16:creationId xmlns:a16="http://schemas.microsoft.com/office/drawing/2014/main" id="{BC61E809-07D2-483B-9BCE-2E21AB3CB903}"/>
               </a:ext>
             </a:extLst>
           </p:cNvPr>
@@ -3134,7 +3268,7 @@
           <p:cNvPr id="2" name="">
             <a:extLst xmlns:a="http://schemas.openxmlformats.org/drawingml/2006/main">
               <a:ext uri="{FF2B5EF4-FFF2-40B4-BE49-F238E27FC236}">
-                <a16:creationId xmlns:a16="http://schemas.microsoft.com/office/drawing/2014/main" id="{D33D0A0F-BA9F-4198-A8AB-9E0A48539040}"/>
+                <a16:creationId xmlns:a16="http://schemas.microsoft.com/office/drawing/2014/main" id="{89014C13-A661-457F-9D08-9B066CB861D7}"/>
               </a:ext>
             </a:extLst>
           </p:cNvPr>
@@ -3223,7 +3357,7 @@
           <p:cNvPr id="3" name="">
             <a:extLst xmlns:a="http://schemas.openxmlformats.org/drawingml/2006/main">
               <a:ext uri="{FF2B5EF4-FFF2-40B4-BE49-F238E27FC236}">
-                <a16:creationId xmlns:a16="http://schemas.microsoft.com/office/drawing/2014/main" id="{9F0EEF52-52BA-4E7E-8720-47E5CF40F5E4}"/>
+                <a16:creationId xmlns:a16="http://schemas.microsoft.com/office/drawing/2014/main" id="{2297B645-AB1A-478F-8591-19FE7070A199}"/>
               </a:ext>
             </a:extLst>
           </p:cNvPr>
@@ -3312,7 +3446,7 @@
           <p:cNvPr id="4" name="">
             <a:extLst xmlns:a="http://schemas.openxmlformats.org/drawingml/2006/main">
               <a:ext uri="{FF2B5EF4-FFF2-40B4-BE49-F238E27FC236}">
-                <a16:creationId xmlns:a16="http://schemas.microsoft.com/office/drawing/2014/main" id="{562853CF-1A92-4757-930D-3B0ACF17384A}"/>
+                <a16:creationId xmlns:a16="http://schemas.microsoft.com/office/drawing/2014/main" id="{D847D46B-7037-44A7-B1BB-342DA550E082}"/>
               </a:ext>
             </a:extLst>
           </p:cNvPr>
@@ -3378,7 +3512,7 @@
           <p:cNvPr id="5" name="">
             <a:extLst xmlns:a="http://schemas.openxmlformats.org/drawingml/2006/main">
               <a:ext uri="{FF2B5EF4-FFF2-40B4-BE49-F238E27FC236}">
-                <a16:creationId xmlns:a16="http://schemas.microsoft.com/office/drawing/2014/main" id="{4B5593D3-8257-44F5-8C70-CC88723E94A1}"/>
+                <a16:creationId xmlns:a16="http://schemas.microsoft.com/office/drawing/2014/main" id="{EDA79ECC-9FF1-417F-A374-1BA934A0C5CC}"/>
               </a:ext>
             </a:extLst>
           </p:cNvPr>
@@ -3388,7 +3522,7 @@
           <p:nvPr/>
         </p:nvPicPr>
         <p:blipFill>
-          <a:blip xmlns:r="http://schemas.openxmlformats.org/officeDocument/2006/relationships" xmlns:a="http://schemas.openxmlformats.org/drawingml/2006/main" r:embed="R2f511fd993464678"/>
+          <a:blip xmlns:r="http://schemas.openxmlformats.org/officeDocument/2006/relationships" xmlns:a="http://schemas.openxmlformats.org/drawingml/2006/main" r:embed="R1afc307bb2224244"/>
           <a:stretch xmlns:a="http://schemas.openxmlformats.org/drawingml/2006/main"/>
         </p:blipFill>
         <p:spPr>
@@ -3404,7 +3538,7 @@
     </p:spTree>
     <p:extLst>
       <p:ext uri="{BB962C8B-B14F-4D97-AF65-F5344CB8AC3E}">
-        <p14:creationId xmlns:p14="http://schemas.microsoft.com/office/powerpoint/2010/main" val="206518004"/>
+        <p14:creationId xmlns:p14="http://schemas.microsoft.com/office/powerpoint/2010/main" val="727633037"/>
       </p:ext>
     </p:extLst>
   </p:cSld>
@@ -3435,7 +3569,7 @@
           <p:cNvPr id="11" name="">
             <a:extLst xmlns:a="http://schemas.openxmlformats.org/drawingml/2006/main">
               <a:ext uri="{FF2B5EF4-FFF2-40B4-BE49-F238E27FC236}">
-                <a16:creationId xmlns:a16="http://schemas.microsoft.com/office/drawing/2014/main" id="{D0C29F97-6BE7-40BF-AD68-8630062D00CA}"/>
+                <a16:creationId xmlns:a16="http://schemas.microsoft.com/office/drawing/2014/main" id="{0756A30C-1338-475A-926B-DCCFEE11BA46}"/>
               </a:ext>
             </a:extLst>
           </p:cNvPr>
@@ -3501,7 +3635,7 @@
           <p:cNvPr id="2" name="">
             <a:extLst xmlns:a="http://schemas.openxmlformats.org/drawingml/2006/main">
               <a:ext uri="{FF2B5EF4-FFF2-40B4-BE49-F238E27FC236}">
-                <a16:creationId xmlns:a16="http://schemas.microsoft.com/office/drawing/2014/main" id="{B6DE3AF1-6CF6-47FF-8067-73A9AC35CD0C}"/>
+                <a16:creationId xmlns:a16="http://schemas.microsoft.com/office/drawing/2014/main" id="{0CB2BC66-0744-4530-8927-48CE96BD8D53}"/>
               </a:ext>
             </a:extLst>
           </p:cNvPr>
@@ -3567,7 +3701,7 @@
           <p:cNvPr id="3" name="">
             <a:extLst xmlns:a="http://schemas.openxmlformats.org/drawingml/2006/main">
               <a:ext uri="{FF2B5EF4-FFF2-40B4-BE49-F238E27FC236}">
-                <a16:creationId xmlns:a16="http://schemas.microsoft.com/office/drawing/2014/main" id="{D19B7963-8295-492B-921C-68B916562AC4}"/>
+                <a16:creationId xmlns:a16="http://schemas.microsoft.com/office/drawing/2014/main" id="{12402A3A-C907-4F81-83C7-4EFF2639DF64}"/>
               </a:ext>
             </a:extLst>
           </p:cNvPr>
@@ -3633,7 +3767,7 @@
           <p:cNvPr id="4" name="">
             <a:extLst xmlns:a="http://schemas.openxmlformats.org/drawingml/2006/main">
               <a:ext uri="{FF2B5EF4-FFF2-40B4-BE49-F238E27FC236}">
-                <a16:creationId xmlns:a16="http://schemas.microsoft.com/office/drawing/2014/main" id="{5F1DAC0D-735D-42BB-8784-E776203D68F0}"/>
+                <a16:creationId xmlns:a16="http://schemas.microsoft.com/office/drawing/2014/main" id="{507247C5-18FF-4552-81CC-3B8F40F9CA9A}"/>
               </a:ext>
             </a:extLst>
           </p:cNvPr>
@@ -3722,7 +3856,7 @@
           <p:cNvPr id="5" name="">
             <a:extLst xmlns:a="http://schemas.openxmlformats.org/drawingml/2006/main">
               <a:ext uri="{FF2B5EF4-FFF2-40B4-BE49-F238E27FC236}">
-                <a16:creationId xmlns:a16="http://schemas.microsoft.com/office/drawing/2014/main" id="{8A5FB85E-869B-400A-85F5-71B90BB5300A}"/>
+                <a16:creationId xmlns:a16="http://schemas.microsoft.com/office/drawing/2014/main" id="{5F0E9446-8327-41D7-BA01-74C55663E781}"/>
               </a:ext>
             </a:extLst>
           </p:cNvPr>
@@ -3788,7 +3922,7 @@
           <p:cNvPr id="6" name="">
             <a:extLst xmlns:a="http://schemas.openxmlformats.org/drawingml/2006/main">
               <a:ext uri="{FF2B5EF4-FFF2-40B4-BE49-F238E27FC236}">
-                <a16:creationId xmlns:a16="http://schemas.microsoft.com/office/drawing/2014/main" id="{AECB8633-B4D0-46DA-828E-61D4B2534858}"/>
+                <a16:creationId xmlns:a16="http://schemas.microsoft.com/office/drawing/2014/main" id="{7C09F0D6-7905-4D3C-BF94-103642A9E43D}"/>
               </a:ext>
             </a:extLst>
           </p:cNvPr>
@@ -3854,7 +3988,7 @@
           <p:cNvPr id="7" name="">
             <a:extLst xmlns:a="http://schemas.openxmlformats.org/drawingml/2006/main">
               <a:ext uri="{FF2B5EF4-FFF2-40B4-BE49-F238E27FC236}">
-                <a16:creationId xmlns:a16="http://schemas.microsoft.com/office/drawing/2014/main" id="{E2AD0DC1-0ADA-42D0-B458-4FEEA3D063E4}"/>
+                <a16:creationId xmlns:a16="http://schemas.microsoft.com/office/drawing/2014/main" id="{825D25A2-61FC-4A24-857F-2A4CAFF794E3}"/>
               </a:ext>
             </a:extLst>
           </p:cNvPr>
@@ -3943,7 +4077,7 @@
           <p:cNvPr id="8" name="">
             <a:extLst xmlns:a="http://schemas.openxmlformats.org/drawingml/2006/main">
               <a:ext uri="{FF2B5EF4-FFF2-40B4-BE49-F238E27FC236}">
-                <a16:creationId xmlns:a16="http://schemas.microsoft.com/office/drawing/2014/main" id="{22C78361-42EE-46A0-AEBC-9F9B98AE033B}"/>
+                <a16:creationId xmlns:a16="http://schemas.microsoft.com/office/drawing/2014/main" id="{769AA764-9DD6-440E-862D-66078105EC72}"/>
               </a:ext>
             </a:extLst>
           </p:cNvPr>
@@ -4009,7 +4143,7 @@
           <p:cNvPr id="9" name="">
             <a:extLst xmlns:a="http://schemas.openxmlformats.org/drawingml/2006/main">
               <a:ext uri="{FF2B5EF4-FFF2-40B4-BE49-F238E27FC236}">
-                <a16:creationId xmlns:a16="http://schemas.microsoft.com/office/drawing/2014/main" id="{764294CA-426A-4BA9-A7F5-39718875A72B}"/>
+                <a16:creationId xmlns:a16="http://schemas.microsoft.com/office/drawing/2014/main" id="{08E4DA99-E09B-44AB-8B31-1B80264B213D}"/>
               </a:ext>
             </a:extLst>
           </p:cNvPr>
@@ -4075,7 +4209,7 @@
           <p:cNvPr id="10" name="">
             <a:extLst xmlns:a="http://schemas.openxmlformats.org/drawingml/2006/main">
               <a:ext uri="{FF2B5EF4-FFF2-40B4-BE49-F238E27FC236}">
-                <a16:creationId xmlns:a16="http://schemas.microsoft.com/office/drawing/2014/main" id="{B9C8BD4A-6B8F-4D37-87E5-73106F024526}"/>
+                <a16:creationId xmlns:a16="http://schemas.microsoft.com/office/drawing/2014/main" id="{64FC5174-4A3B-4166-9E33-75F3516DE666}"/>
               </a:ext>
             </a:extLst>
           </p:cNvPr>
@@ -4162,7 +4296,7 @@
     </p:spTree>
     <p:extLst>
       <p:ext uri="{BB962C8B-B14F-4D97-AF65-F5344CB8AC3E}">
-        <p14:creationId xmlns:p14="http://schemas.microsoft.com/office/powerpoint/2010/main" val="717291739"/>
+        <p14:creationId xmlns:p14="http://schemas.microsoft.com/office/powerpoint/2010/main" val="169608374"/>
       </p:ext>
     </p:extLst>
   </p:cSld>
@@ -4193,7 +4327,7 @@
           <p:cNvPr id="12" name="">
             <a:extLst xmlns:a="http://schemas.openxmlformats.org/drawingml/2006/main">
               <a:ext uri="{FF2B5EF4-FFF2-40B4-BE49-F238E27FC236}">
-                <a16:creationId xmlns:a16="http://schemas.microsoft.com/office/drawing/2014/main" id="{22777B5B-6D8A-4760-AF9C-2DBA5255537B}"/>
+                <a16:creationId xmlns:a16="http://schemas.microsoft.com/office/drawing/2014/main" id="{8BD5ED6C-B5A2-4083-BC4F-0D6AF56B84DC}"/>
               </a:ext>
             </a:extLst>
           </p:cNvPr>
@@ -4249,7 +4383,7 @@
                 <a:ea typeface="Arial"/>
                 <a:cs typeface="Arial"/>
               </a:rPr>
-              <a:t>Бүртгэл ба нэвтрэлт</a:t>
+              <a:t>Аппын зөвшөөрлүүд</a:t>
             </a:r>
           </a:p>
         </p:txBody>
@@ -4259,7 +4393,7 @@
           <p:cNvPr id="2" name="">
             <a:extLst xmlns:a="http://schemas.openxmlformats.org/drawingml/2006/main">
               <a:ext uri="{FF2B5EF4-FFF2-40B4-BE49-F238E27FC236}">
-                <a16:creationId xmlns:a16="http://schemas.microsoft.com/office/drawing/2014/main" id="{0DC66D40-3150-4D4E-87AC-DF8F686B1106}"/>
+                <a16:creationId xmlns:a16="http://schemas.microsoft.com/office/drawing/2014/main" id="{703813D8-B02D-42A8-BE98-74E3566D7950}"/>
               </a:ext>
             </a:extLst>
           </p:cNvPr>
@@ -4270,7 +4404,7 @@
         </p:nvSpPr>
         <p:spPr>
           <a:xfrm xmlns:a="http://schemas.openxmlformats.org/drawingml/2006/main">
-            <a:off x="647700" y="1638300"/>
+            <a:off x="647700" y="1628775"/>
             <a:ext cx="552450" cy="495300"/>
           </a:xfrm>
           <a:prstGeom xmlns:a="http://schemas.openxmlformats.org/drawingml/2006/main" prst="rect">
@@ -4325,7 +4459,7 @@
           <p:cNvPr id="3" name="">
             <a:extLst xmlns:a="http://schemas.openxmlformats.org/drawingml/2006/main">
               <a:ext uri="{FF2B5EF4-FFF2-40B4-BE49-F238E27FC236}">
-                <a16:creationId xmlns:a16="http://schemas.microsoft.com/office/drawing/2014/main" id="{E39E685E-0650-424C-ACB4-FA8D9D0595D3}"/>
+                <a16:creationId xmlns:a16="http://schemas.microsoft.com/office/drawing/2014/main" id="{48322E9E-023E-4D8F-AA14-370591432BCD}"/>
               </a:ext>
             </a:extLst>
           </p:cNvPr>
@@ -4336,8 +4470,8 @@
         </p:nvSpPr>
         <p:spPr>
           <a:xfrm xmlns:a="http://schemas.openxmlformats.org/drawingml/2006/main">
-            <a:off x="1371600" y="1638300"/>
-            <a:ext cx="7143750" cy="438150"/>
+            <a:off x="1371600" y="1628775"/>
+            <a:ext cx="9144000" cy="438150"/>
           </a:xfrm>
           <a:prstGeom xmlns:a="http://schemas.openxmlformats.org/drawingml/2006/main" prst="rect">
             <a:avLst/>
@@ -4381,7 +4515,7 @@
                 <a:ea typeface="Arial"/>
                 <a:cs typeface="Arial"/>
               </a:rPr>
-              <a:t>DAN-аар бүртгүүлэх</a:t>
+              <a:t>Мэдэгдэл</a:t>
             </a:r>
           </a:p>
         </p:txBody>
@@ -4391,7 +4525,7 @@
           <p:cNvPr id="4" name="">
             <a:extLst xmlns:a="http://schemas.openxmlformats.org/drawingml/2006/main">
               <a:ext uri="{FF2B5EF4-FFF2-40B4-BE49-F238E27FC236}">
-                <a16:creationId xmlns:a16="http://schemas.microsoft.com/office/drawing/2014/main" id="{8ADA7BB5-64C6-42E7-9AA8-0D243D49E511}"/>
+                <a16:creationId xmlns:a16="http://schemas.microsoft.com/office/drawing/2014/main" id="{61D2D379-FEB6-4F50-81DC-C11685E3C616}"/>
               </a:ext>
             </a:extLst>
           </p:cNvPr>
@@ -4402,8 +4536,8 @@
         </p:nvSpPr>
         <p:spPr>
           <a:xfrm xmlns:a="http://schemas.openxmlformats.org/drawingml/2006/main">
-            <a:off x="1371600" y="2133600"/>
-            <a:ext cx="7143750" cy="819150"/>
+            <a:off x="1371600" y="2124075"/>
+            <a:ext cx="9144000" cy="819150"/>
           </a:xfrm>
           <a:prstGeom xmlns:a="http://schemas.openxmlformats.org/drawingml/2006/main" prst="rect">
             <a:avLst/>
@@ -4447,7 +4581,30 @@
                 <a:ea typeface="Arial"/>
                 <a:cs typeface="Arial"/>
               </a:rPr>
-              <a:t>Аппын зааврын дагуу мэдээллээ баталгаажуулна.</a:t>
+              <a:t>Allow / Зөвшөөрөх сонголтоор мэдэгдлийг асаана.</a:t>
+            </a:r>
+          </a:p>
+          <a:p xmlns:a="http://schemas.openxmlformats.org/drawingml/2006/main">
+            <a:pPr>
+              <a:defRPr sz="1875" b="0">
+                <a:solidFill>
+                  <a:srgbClr val="251B35"/>
+                </a:solidFill>
+                <a:latin typeface="Arial"/>
+                <a:ea typeface="Arial"/>
+                <a:cs typeface="Arial"/>
+              </a:defRPr>
+            </a:pPr>
+            <a:r>
+              <a:rPr sz="1875" b="0">
+                <a:solidFill>
+                  <a:srgbClr val="251B35"/>
+                </a:solidFill>
+                <a:latin typeface="Arial"/>
+                <a:ea typeface="Arial"/>
+                <a:cs typeface="Arial"/>
+              </a:rPr>
+              <a:t>Түрээсийн үйл явдлын push мэдэгдлийг шалгахад хэрэгтэй.</a:t>
             </a:r>
           </a:p>
         </p:txBody>
@@ -4457,7 +4614,7 @@
           <p:cNvPr id="5" name="">
             <a:extLst xmlns:a="http://schemas.openxmlformats.org/drawingml/2006/main">
               <a:ext uri="{FF2B5EF4-FFF2-40B4-BE49-F238E27FC236}">
-                <a16:creationId xmlns:a16="http://schemas.microsoft.com/office/drawing/2014/main" id="{943207C3-0D39-4CD1-9EE4-45EC158427B6}"/>
+                <a16:creationId xmlns:a16="http://schemas.microsoft.com/office/drawing/2014/main" id="{DFFD9B70-1109-4A0A-B164-E01920293EA9}"/>
               </a:ext>
             </a:extLst>
           </p:cNvPr>
@@ -4468,7 +4625,7 @@
         </p:nvSpPr>
         <p:spPr>
           <a:xfrm xmlns:a="http://schemas.openxmlformats.org/drawingml/2006/main">
-            <a:off x="647700" y="3086100"/>
+            <a:off x="647700" y="3105150"/>
             <a:ext cx="552450" cy="495300"/>
           </a:xfrm>
           <a:prstGeom xmlns:a="http://schemas.openxmlformats.org/drawingml/2006/main" prst="rect">
@@ -4523,7 +4680,7 @@
           <p:cNvPr id="6" name="">
             <a:extLst xmlns:a="http://schemas.openxmlformats.org/drawingml/2006/main">
               <a:ext uri="{FF2B5EF4-FFF2-40B4-BE49-F238E27FC236}">
-                <a16:creationId xmlns:a16="http://schemas.microsoft.com/office/drawing/2014/main" id="{BB3E220C-E421-4926-80C6-90647F2F6FC1}"/>
+                <a16:creationId xmlns:a16="http://schemas.microsoft.com/office/drawing/2014/main" id="{3F7D8CAE-0913-49FF-8362-298EDA17CB57}"/>
               </a:ext>
             </a:extLst>
           </p:cNvPr>
@@ -4534,8 +4691,8 @@
         </p:nvSpPr>
         <p:spPr>
           <a:xfrm xmlns:a="http://schemas.openxmlformats.org/drawingml/2006/main">
-            <a:off x="1371600" y="3086100"/>
-            <a:ext cx="7143750" cy="438150"/>
+            <a:off x="1371600" y="3105150"/>
+            <a:ext cx="9144000" cy="438150"/>
           </a:xfrm>
           <a:prstGeom xmlns:a="http://schemas.openxmlformats.org/drawingml/2006/main" prst="rect">
             <a:avLst/>
@@ -4579,7 +4736,7 @@
                 <a:ea typeface="Arial"/>
                 <a:cs typeface="Arial"/>
               </a:rPr>
-              <a:t>Бүртгэлээ дуусгах</a:t>
+              <a:t>Байршил</a:t>
             </a:r>
           </a:p>
         </p:txBody>
@@ -4589,7 +4746,7 @@
           <p:cNvPr id="7" name="">
             <a:extLst xmlns:a="http://schemas.openxmlformats.org/drawingml/2006/main">
               <a:ext uri="{FF2B5EF4-FFF2-40B4-BE49-F238E27FC236}">
-                <a16:creationId xmlns:a16="http://schemas.microsoft.com/office/drawing/2014/main" id="{9A21766E-E7AC-4D42-B4F5-809BA83A22EC}"/>
+                <a16:creationId xmlns:a16="http://schemas.microsoft.com/office/drawing/2014/main" id="{E1D77F85-2351-4650-BF96-78F53CD8E092}"/>
               </a:ext>
             </a:extLst>
           </p:cNvPr>
@@ -4600,8 +4757,8 @@
         </p:nvSpPr>
         <p:spPr>
           <a:xfrm xmlns:a="http://schemas.openxmlformats.org/drawingml/2006/main">
-            <a:off x="1371600" y="3581400"/>
-            <a:ext cx="7143750" cy="819150"/>
+            <a:off x="1371600" y="3600450"/>
+            <a:ext cx="9144000" cy="819150"/>
           </a:xfrm>
           <a:prstGeom xmlns:a="http://schemas.openxmlformats.org/drawingml/2006/main" prst="rect">
             <a:avLst/>
@@ -4645,7 +4802,7 @@
                 <a:ea typeface="Arial"/>
                 <a:cs typeface="Arial"/>
               </a:rPr>
-              <a:t>Үйлчилгээний нөхцөлтэй танилцаж зөвшөөрөөд,</a:t>
+              <a:t>Апп ашиглаж байх үед байршил ашиглахыг зөвшөөрнө.</a:t>
             </a:r>
           </a:p>
           <a:p xmlns:a="http://schemas.openxmlformats.org/drawingml/2006/main">
@@ -4668,7 +4825,7 @@
                 <a:ea typeface="Arial"/>
                 <a:cs typeface="Arial"/>
               </a:rPr>
-              <a:t>утасны дугаар болон нууц үгээ хадгална.</a:t>
+              <a:t>Газрын зураг, “Надтай ойр” хайлтыг туршина.</a:t>
             </a:r>
           </a:p>
         </p:txBody>
@@ -4678,7 +4835,7 @@
           <p:cNvPr id="8" name="">
             <a:extLst xmlns:a="http://schemas.openxmlformats.org/drawingml/2006/main">
               <a:ext uri="{FF2B5EF4-FFF2-40B4-BE49-F238E27FC236}">
-                <a16:creationId xmlns:a16="http://schemas.microsoft.com/office/drawing/2014/main" id="{67A0C606-DEA7-44D9-BEAC-066A5AAA60F1}"/>
+                <a16:creationId xmlns:a16="http://schemas.microsoft.com/office/drawing/2014/main" id="{AC02308C-D4F1-4C26-AC99-4717475260BC}"/>
               </a:ext>
             </a:extLst>
           </p:cNvPr>
@@ -4689,7 +4846,7 @@
         </p:nvSpPr>
         <p:spPr>
           <a:xfrm xmlns:a="http://schemas.openxmlformats.org/drawingml/2006/main">
-            <a:off x="647700" y="4591050"/>
+            <a:off x="647700" y="4581525"/>
             <a:ext cx="552450" cy="495300"/>
           </a:xfrm>
           <a:prstGeom xmlns:a="http://schemas.openxmlformats.org/drawingml/2006/main" prst="rect">
@@ -4744,7 +4901,7 @@
           <p:cNvPr id="9" name="">
             <a:extLst xmlns:a="http://schemas.openxmlformats.org/drawingml/2006/main">
               <a:ext uri="{FF2B5EF4-FFF2-40B4-BE49-F238E27FC236}">
-                <a16:creationId xmlns:a16="http://schemas.microsoft.com/office/drawing/2014/main" id="{A04C737F-40B8-43CB-AC0F-87B0D27CD86D}"/>
+                <a16:creationId xmlns:a16="http://schemas.microsoft.com/office/drawing/2014/main" id="{EC98801C-C7A4-4775-A41C-B52C10D571A9}"/>
               </a:ext>
             </a:extLst>
           </p:cNvPr>
@@ -4755,8 +4912,8 @@
         </p:nvSpPr>
         <p:spPr>
           <a:xfrm xmlns:a="http://schemas.openxmlformats.org/drawingml/2006/main">
-            <a:off x="1371600" y="4591050"/>
-            <a:ext cx="7143750" cy="438150"/>
+            <a:off x="1371600" y="4581525"/>
+            <a:ext cx="9144000" cy="438150"/>
           </a:xfrm>
           <a:prstGeom xmlns:a="http://schemas.openxmlformats.org/drawingml/2006/main" prst="rect">
             <a:avLst/>
@@ -4800,7 +4957,7 @@
                 <a:ea typeface="Arial"/>
                 <a:cs typeface="Arial"/>
               </a:rPr>
-              <a:t>Дахин нэвтрэх туршилт</a:t>
+              <a:t>Зураг сонгох</a:t>
             </a:r>
           </a:p>
         </p:txBody>
@@ -4810,7 +4967,7 @@
           <p:cNvPr id="10" name="">
             <a:extLst xmlns:a="http://schemas.openxmlformats.org/drawingml/2006/main">
               <a:ext uri="{FF2B5EF4-FFF2-40B4-BE49-F238E27FC236}">
-                <a16:creationId xmlns:a16="http://schemas.microsoft.com/office/drawing/2014/main" id="{4718F319-8233-43C8-9F49-A358B79F40EF}"/>
+                <a16:creationId xmlns:a16="http://schemas.microsoft.com/office/drawing/2014/main" id="{083E8B0D-2B68-491D-B3FB-41173FF4C571}"/>
               </a:ext>
             </a:extLst>
           </p:cNvPr>
@@ -4821,8 +4978,8 @@
         </p:nvSpPr>
         <p:spPr>
           <a:xfrm xmlns:a="http://schemas.openxmlformats.org/drawingml/2006/main">
-            <a:off x="1371600" y="5086350"/>
-            <a:ext cx="7143750" cy="819150"/>
+            <a:off x="1371600" y="5076825"/>
+            <a:ext cx="9144000" cy="819150"/>
           </a:xfrm>
           <a:prstGeom xmlns:a="http://schemas.openxmlformats.org/drawingml/2006/main" prst="rect">
             <a:avLst/>
@@ -4866,7 +5023,7 @@
                 <a:ea typeface="Arial"/>
                 <a:cs typeface="Arial"/>
               </a:rPr>
-              <a:t>Гараад, хадгалсан утасны дугаар болон</a:t>
+              <a:t>Зар оруулах үед галерейн зөвшөөрөл хүсэж болно.</a:t>
             </a:r>
           </a:p>
           <a:p xmlns:a="http://schemas.openxmlformats.org/drawingml/2006/main">
@@ -4889,43 +5046,81 @@
                 <a:ea typeface="Arial"/>
                 <a:cs typeface="Arial"/>
               </a:rPr>
-              <a:t>нууц үгээрээ дахин нэвтэрч үзнэ.</a:t>
-            </a:r>
-          </a:p>
-        </p:txBody>
-      </p:sp>
-      <p:pic>
-        <p:nvPicPr>
+              <a:t>Сонгох зурагтаа хандах эрх өгнө.</a:t>
+            </a:r>
+          </a:p>
+        </p:txBody>
+      </p:sp>
+      <p:sp>
+        <p:nvSpPr>
           <p:cNvPr id="11" name="">
             <a:extLst xmlns:a="http://schemas.openxmlformats.org/drawingml/2006/main">
               <a:ext uri="{FF2B5EF4-FFF2-40B4-BE49-F238E27FC236}">
-                <a16:creationId xmlns:a16="http://schemas.microsoft.com/office/drawing/2014/main" id="{277A2EF8-904F-4609-8465-B18812444B05}"/>
+                <a16:creationId xmlns:a16="http://schemas.microsoft.com/office/drawing/2014/main" id="{C764A4E7-10E2-415F-89CF-61264E51A276}"/>
               </a:ext>
             </a:extLst>
           </p:cNvPr>
-          <p:cNvPicPr>
-            <a:picLocks xmlns:a="http://schemas.openxmlformats.org/drawingml/2006/main" noChangeAspect="1"/>
-          </p:cNvPicPr>
+          <p:cNvSpPr>
+            <a:spLocks xmlns:a="http://schemas.openxmlformats.org/drawingml/2006/main" noGrp="1"/>
+          </p:cNvSpPr>
           <p:nvPr/>
-        </p:nvPicPr>
-        <p:blipFill>
-          <a:blip xmlns:r="http://schemas.openxmlformats.org/officeDocument/2006/relationships" xmlns:a="http://schemas.openxmlformats.org/drawingml/2006/main" r:embed="Rfaca07be70c64041"/>
-          <a:stretch xmlns:a="http://schemas.openxmlformats.org/drawingml/2006/main"/>
-        </p:blipFill>
+        </p:nvSpPr>
         <p:spPr>
           <a:xfrm xmlns:a="http://schemas.openxmlformats.org/drawingml/2006/main">
-            <a:off x="8869092" y="1581150"/>
-            <a:ext cx="2245267" cy="4857750"/>
+            <a:off x="647700" y="6076950"/>
+            <a:ext cx="10820400" cy="457200"/>
           </a:xfrm>
           <a:prstGeom xmlns:a="http://schemas.openxmlformats.org/drawingml/2006/main" prst="rect">
             <a:avLst/>
           </a:prstGeom>
-        </p:spPr>
-      </p:pic>
+          <a:noFill xmlns:a="http://schemas.openxmlformats.org/drawingml/2006/main"/>
+          <a:ln xmlns:a="http://schemas.openxmlformats.org/drawingml/2006/main" w="0">
+            <a:noFill/>
+          </a:ln>
+        </p:spPr>
+        <p:txBody>
+          <a:bodyPr xmlns:a="http://schemas.openxmlformats.org/drawingml/2006/main"/>
+          <a:lstStyle xmlns:a="http://schemas.openxmlformats.org/drawingml/2006/main">
+            <a:defPPr>
+              <a:defRPr sz="1725" b="0">
+                <a:solidFill>
+                  <a:srgbClr val="7409B7"/>
+                </a:solidFill>
+                <a:latin typeface="Arial"/>
+                <a:ea typeface="Arial"/>
+                <a:cs typeface="Arial"/>
+              </a:defRPr>
+            </a:defPPr>
+          </a:lstStyle>
+          <a:p xmlns:a="http://schemas.openxmlformats.org/drawingml/2006/main">
+            <a:pPr>
+              <a:defRPr sz="1725" b="0">
+                <a:solidFill>
+                  <a:srgbClr val="7409B7"/>
+                </a:solidFill>
+                <a:latin typeface="Arial"/>
+                <a:ea typeface="Arial"/>
+                <a:cs typeface="Arial"/>
+              </a:defRPr>
+            </a:pPr>
+            <a:r>
+              <a:rPr sz="1725" b="0">
+                <a:solidFill>
+                  <a:srgbClr val="7409B7"/>
+                </a:solidFill>
+                <a:latin typeface="Arial"/>
+                <a:ea typeface="Arial"/>
+                <a:cs typeface="Arial"/>
+              </a:rPr>
+              <a:t>Өмнө татгалзсан бол утасны Тохиргоо дотор Tureesly-ийн зөвшөөрлийг шалгана.</a:t>
+            </a:r>
+          </a:p>
+        </p:txBody>
+      </p:sp>
     </p:spTree>
     <p:extLst>
       <p:ext uri="{BB962C8B-B14F-4D97-AF65-F5344CB8AC3E}">
-        <p14:creationId xmlns:p14="http://schemas.microsoft.com/office/powerpoint/2010/main" val="2141691569"/>
+        <p14:creationId xmlns:p14="http://schemas.microsoft.com/office/powerpoint/2010/main" val="569170177"/>
       </p:ext>
     </p:extLst>
   </p:cSld>
@@ -4956,7 +5151,7 @@
           <p:cNvPr id="12" name="">
             <a:extLst xmlns:a="http://schemas.openxmlformats.org/drawingml/2006/main">
               <a:ext uri="{FF2B5EF4-FFF2-40B4-BE49-F238E27FC236}">
-                <a16:creationId xmlns:a16="http://schemas.microsoft.com/office/drawing/2014/main" id="{0E2D4A25-294A-4928-A870-7E783534BA31}"/>
+                <a16:creationId xmlns:a16="http://schemas.microsoft.com/office/drawing/2014/main" id="{94ABACB9-7798-4073-A08C-54604E84C993}"/>
               </a:ext>
             </a:extLst>
           </p:cNvPr>
@@ -5012,7 +5207,7 @@
                 <a:ea typeface="Arial"/>
                 <a:cs typeface="Arial"/>
               </a:rPr>
-              <a:t>Хэрэгтэй зүйлээ хайх</a:t>
+              <a:t>Бүртгэл ба нэвтрэлт</a:t>
             </a:r>
           </a:p>
         </p:txBody>
@@ -5022,7 +5217,7 @@
           <p:cNvPr id="2" name="">
             <a:extLst xmlns:a="http://schemas.openxmlformats.org/drawingml/2006/main">
               <a:ext uri="{FF2B5EF4-FFF2-40B4-BE49-F238E27FC236}">
-                <a16:creationId xmlns:a16="http://schemas.microsoft.com/office/drawing/2014/main" id="{F1F714C6-4BE7-4EA9-93AC-6806B6B3AB5A}"/>
+                <a16:creationId xmlns:a16="http://schemas.microsoft.com/office/drawing/2014/main" id="{849C568A-3571-4B0D-B454-8F33AE950D7B}"/>
               </a:ext>
             </a:extLst>
           </p:cNvPr>
@@ -5033,7 +5228,7 @@
         </p:nvSpPr>
         <p:spPr>
           <a:xfrm xmlns:a="http://schemas.openxmlformats.org/drawingml/2006/main">
-            <a:off x="647700" y="1676400"/>
+            <a:off x="647700" y="1638300"/>
             <a:ext cx="552450" cy="495300"/>
           </a:xfrm>
           <a:prstGeom xmlns:a="http://schemas.openxmlformats.org/drawingml/2006/main" prst="rect">
@@ -5088,7 +5283,7 @@
           <p:cNvPr id="3" name="">
             <a:extLst xmlns:a="http://schemas.openxmlformats.org/drawingml/2006/main">
               <a:ext uri="{FF2B5EF4-FFF2-40B4-BE49-F238E27FC236}">
-                <a16:creationId xmlns:a16="http://schemas.microsoft.com/office/drawing/2014/main" id="{5AA19C04-2C02-42FE-AC5B-8BBF2DC4A796}"/>
+                <a16:creationId xmlns:a16="http://schemas.microsoft.com/office/drawing/2014/main" id="{1BBFECE7-137D-43AC-A490-B45A33282D9B}"/>
               </a:ext>
             </a:extLst>
           </p:cNvPr>
@@ -5099,7 +5294,7 @@
         </p:nvSpPr>
         <p:spPr>
           <a:xfrm xmlns:a="http://schemas.openxmlformats.org/drawingml/2006/main">
-            <a:off x="1371600" y="1676400"/>
+            <a:off x="1371600" y="1638300"/>
             <a:ext cx="7143750" cy="438150"/>
           </a:xfrm>
           <a:prstGeom xmlns:a="http://schemas.openxmlformats.org/drawingml/2006/main" prst="rect">
@@ -5144,7 +5339,7 @@
                 <a:ea typeface="Arial"/>
                 <a:cs typeface="Arial"/>
               </a:rPr>
-              <a:t>Хайлт ба ангилал</a:t>
+              <a:t>DAN-аар бүртгүүлэх</a:t>
             </a:r>
           </a:p>
         </p:txBody>
@@ -5154,7 +5349,7 @@
           <p:cNvPr id="4" name="">
             <a:extLst xmlns:a="http://schemas.openxmlformats.org/drawingml/2006/main">
               <a:ext uri="{FF2B5EF4-FFF2-40B4-BE49-F238E27FC236}">
-                <a16:creationId xmlns:a16="http://schemas.microsoft.com/office/drawing/2014/main" id="{0B7473EA-79BC-430E-855F-9CA36AF1B3A1}"/>
+                <a16:creationId xmlns:a16="http://schemas.microsoft.com/office/drawing/2014/main" id="{CDBCF722-9152-4F11-8329-9F307D34254A}"/>
               </a:ext>
             </a:extLst>
           </p:cNvPr>
@@ -5165,7 +5360,7 @@
         </p:nvSpPr>
         <p:spPr>
           <a:xfrm xmlns:a="http://schemas.openxmlformats.org/drawingml/2006/main">
-            <a:off x="1371600" y="2171700"/>
+            <a:off x="1371600" y="2133600"/>
             <a:ext cx="7143750" cy="819150"/>
           </a:xfrm>
           <a:prstGeom xmlns:a="http://schemas.openxmlformats.org/drawingml/2006/main" prst="rect">
@@ -5210,30 +5405,7 @@
                 <a:ea typeface="Arial"/>
                 <a:cs typeface="Arial"/>
               </a:rPr>
-              <a:t>Камер, дугуй, майхан зэрэг өөрт хэрэгтэй</a:t>
-            </a:r>
-          </a:p>
-          <a:p xmlns:a="http://schemas.openxmlformats.org/drawingml/2006/main">
-            <a:pPr>
-              <a:defRPr sz="1875" b="0">
-                <a:solidFill>
-                  <a:srgbClr val="251B35"/>
-                </a:solidFill>
-                <a:latin typeface="Arial"/>
-                <a:ea typeface="Arial"/>
-                <a:cs typeface="Arial"/>
-              </a:defRPr>
-            </a:pPr>
-            <a:r>
-              <a:rPr sz="1875" b="0">
-                <a:solidFill>
-                  <a:srgbClr val="251B35"/>
-                </a:solidFill>
-                <a:latin typeface="Arial"/>
-                <a:ea typeface="Arial"/>
-                <a:cs typeface="Arial"/>
-              </a:rPr>
-              <a:t>зүйлээ хайж, ангиллаар шүүнэ.</a:t>
+              <a:t>Аппын зааврын дагуу мэдээллээ баталгаажуулна.</a:t>
             </a:r>
           </a:p>
         </p:txBody>
@@ -5243,7 +5415,7 @@
           <p:cNvPr id="5" name="">
             <a:extLst xmlns:a="http://schemas.openxmlformats.org/drawingml/2006/main">
               <a:ext uri="{FF2B5EF4-FFF2-40B4-BE49-F238E27FC236}">
-                <a16:creationId xmlns:a16="http://schemas.microsoft.com/office/drawing/2014/main" id="{B1B9027C-7234-4FC3-A5D1-B18E9AB209D4}"/>
+                <a16:creationId xmlns:a16="http://schemas.microsoft.com/office/drawing/2014/main" id="{D687D7CF-DEED-4112-9A0F-995D1D837B66}"/>
               </a:ext>
             </a:extLst>
           </p:cNvPr>
@@ -5254,7 +5426,7 @@
         </p:nvSpPr>
         <p:spPr>
           <a:xfrm xmlns:a="http://schemas.openxmlformats.org/drawingml/2006/main">
-            <a:off x="647700" y="3209925"/>
+            <a:off x="647700" y="3086100"/>
             <a:ext cx="552450" cy="495300"/>
           </a:xfrm>
           <a:prstGeom xmlns:a="http://schemas.openxmlformats.org/drawingml/2006/main" prst="rect">
@@ -5309,7 +5481,7 @@
           <p:cNvPr id="6" name="">
             <a:extLst xmlns:a="http://schemas.openxmlformats.org/drawingml/2006/main">
               <a:ext uri="{FF2B5EF4-FFF2-40B4-BE49-F238E27FC236}">
-                <a16:creationId xmlns:a16="http://schemas.microsoft.com/office/drawing/2014/main" id="{398E8329-0F37-4764-8DB8-FFBCE2F5F0E8}"/>
+                <a16:creationId xmlns:a16="http://schemas.microsoft.com/office/drawing/2014/main" id="{80B7DD6E-ECE9-48BB-80E2-8D95711B3E3D}"/>
               </a:ext>
             </a:extLst>
           </p:cNvPr>
@@ -5320,7 +5492,7 @@
         </p:nvSpPr>
         <p:spPr>
           <a:xfrm xmlns:a="http://schemas.openxmlformats.org/drawingml/2006/main">
-            <a:off x="1371600" y="3209925"/>
+            <a:off x="1371600" y="3086100"/>
             <a:ext cx="7143750" cy="438150"/>
           </a:xfrm>
           <a:prstGeom xmlns:a="http://schemas.openxmlformats.org/drawingml/2006/main" prst="rect">
@@ -5365,7 +5537,7 @@
                 <a:ea typeface="Arial"/>
                 <a:cs typeface="Arial"/>
               </a:rPr>
-              <a:t>Ойролцоох зар</a:t>
+              <a:t>Бүртгэлээ дуусгах</a:t>
             </a:r>
           </a:p>
         </p:txBody>
@@ -5375,7 +5547,7 @@
           <p:cNvPr id="7" name="">
             <a:extLst xmlns:a="http://schemas.openxmlformats.org/drawingml/2006/main">
               <a:ext uri="{FF2B5EF4-FFF2-40B4-BE49-F238E27FC236}">
-                <a16:creationId xmlns:a16="http://schemas.microsoft.com/office/drawing/2014/main" id="{0D75D9B3-7FA5-41B1-B92A-0D43BC224F74}"/>
+                <a16:creationId xmlns:a16="http://schemas.microsoft.com/office/drawing/2014/main" id="{677B5D6C-9AE4-4B24-AFD5-377EDE533CFB}"/>
               </a:ext>
             </a:extLst>
           </p:cNvPr>
@@ -5386,7 +5558,7 @@
         </p:nvSpPr>
         <p:spPr>
           <a:xfrm xmlns:a="http://schemas.openxmlformats.org/drawingml/2006/main">
-            <a:off x="1371600" y="3705225"/>
+            <a:off x="1371600" y="3581400"/>
             <a:ext cx="7143750" cy="819150"/>
           </a:xfrm>
           <a:prstGeom xmlns:a="http://schemas.openxmlformats.org/drawingml/2006/main" prst="rect">
@@ -5431,7 +5603,7 @@
                 <a:ea typeface="Arial"/>
                 <a:cs typeface="Arial"/>
               </a:rPr>
-              <a:t>Байршлын хэсгээр өөрт ойр байгаа</a:t>
+              <a:t>Үйлчилгээний нөхцөлтэй танилцаж зөвшөөрөөд,</a:t>
             </a:r>
           </a:p>
           <a:p xmlns:a="http://schemas.openxmlformats.org/drawingml/2006/main">
@@ -5454,7 +5626,7 @@
                 <a:ea typeface="Arial"/>
                 <a:cs typeface="Arial"/>
               </a:rPr>
-              <a:t>түрээсийн заруудыг үзнэ.</a:t>
+              <a:t>утасны дугаар болон нууц үгээ хадгална.</a:t>
             </a:r>
           </a:p>
         </p:txBody>
@@ -5464,7 +5636,7 @@
           <p:cNvPr id="8" name="">
             <a:extLst xmlns:a="http://schemas.openxmlformats.org/drawingml/2006/main">
               <a:ext uri="{FF2B5EF4-FFF2-40B4-BE49-F238E27FC236}">
-                <a16:creationId xmlns:a16="http://schemas.microsoft.com/office/drawing/2014/main" id="{11E42185-054A-468A-8764-946C0491E210}"/>
+                <a16:creationId xmlns:a16="http://schemas.microsoft.com/office/drawing/2014/main" id="{39D8D5FB-6F56-42E8-97F3-C59D518529F1}"/>
               </a:ext>
             </a:extLst>
           </p:cNvPr>
@@ -5475,7 +5647,7 @@
         </p:nvSpPr>
         <p:spPr>
           <a:xfrm xmlns:a="http://schemas.openxmlformats.org/drawingml/2006/main">
-            <a:off x="647700" y="4743450"/>
+            <a:off x="647700" y="4591050"/>
             <a:ext cx="552450" cy="495300"/>
           </a:xfrm>
           <a:prstGeom xmlns:a="http://schemas.openxmlformats.org/drawingml/2006/main" prst="rect">
@@ -5530,7 +5702,7 @@
           <p:cNvPr id="9" name="">
             <a:extLst xmlns:a="http://schemas.openxmlformats.org/drawingml/2006/main">
               <a:ext uri="{FF2B5EF4-FFF2-40B4-BE49-F238E27FC236}">
-                <a16:creationId xmlns:a16="http://schemas.microsoft.com/office/drawing/2014/main" id="{A79EEBE3-5426-44EC-927F-03F67C107102}"/>
+                <a16:creationId xmlns:a16="http://schemas.microsoft.com/office/drawing/2014/main" id="{5FC48420-6673-44C8-8E34-BE34CC92644F}"/>
               </a:ext>
             </a:extLst>
           </p:cNvPr>
@@ -5541,7 +5713,7 @@
         </p:nvSpPr>
         <p:spPr>
           <a:xfrm xmlns:a="http://schemas.openxmlformats.org/drawingml/2006/main">
-            <a:off x="1371600" y="4743450"/>
+            <a:off x="1371600" y="4591050"/>
             <a:ext cx="7143750" cy="438150"/>
           </a:xfrm>
           <a:prstGeom xmlns:a="http://schemas.openxmlformats.org/drawingml/2006/main" prst="rect">
@@ -5586,7 +5758,7 @@
                 <a:ea typeface="Arial"/>
                 <a:cs typeface="Arial"/>
               </a:rPr>
-              <a:t>Зарын дэлгэрэнгүй</a:t>
+              <a:t>Дахин нэвтрэх туршилт</a:t>
             </a:r>
           </a:p>
         </p:txBody>
@@ -5596,7 +5768,7 @@
           <p:cNvPr id="10" name="">
             <a:extLst xmlns:a="http://schemas.openxmlformats.org/drawingml/2006/main">
               <a:ext uri="{FF2B5EF4-FFF2-40B4-BE49-F238E27FC236}">
-                <a16:creationId xmlns:a16="http://schemas.microsoft.com/office/drawing/2014/main" id="{4E4E175B-6D72-4AD0-9161-0A01B6F49204}"/>
+                <a16:creationId xmlns:a16="http://schemas.microsoft.com/office/drawing/2014/main" id="{880957D1-6B74-49F4-9F5B-89B4453DAAC7}"/>
               </a:ext>
             </a:extLst>
           </p:cNvPr>
@@ -5607,7 +5779,7 @@
         </p:nvSpPr>
         <p:spPr>
           <a:xfrm xmlns:a="http://schemas.openxmlformats.org/drawingml/2006/main">
-            <a:off x="1371600" y="5238750"/>
+            <a:off x="1371600" y="5086350"/>
             <a:ext cx="7143750" cy="819150"/>
           </a:xfrm>
           <a:prstGeom xmlns:a="http://schemas.openxmlformats.org/drawingml/2006/main" prst="rect">
@@ -5652,7 +5824,7 @@
                 <a:ea typeface="Arial"/>
                 <a:cs typeface="Arial"/>
               </a:rPr>
-              <a:t>Үнэ, зураг, тайлбарыг шалгаад</a:t>
+              <a:t>Гараад, хадгалсан утасны дугаар болон</a:t>
             </a:r>
           </a:p>
           <a:p xmlns:a="http://schemas.openxmlformats.org/drawingml/2006/main">
@@ -5675,7 +5847,7 @@
                 <a:ea typeface="Arial"/>
                 <a:cs typeface="Arial"/>
               </a:rPr>
-              <a:t>сонирхсон зараа хадгалж үзнэ.</a:t>
+              <a:t>нууц үгээрээ дахин нэвтэрч үзнэ.</a:t>
             </a:r>
           </a:p>
         </p:txBody>
@@ -5685,7 +5857,7 @@
           <p:cNvPr id="11" name="">
             <a:extLst xmlns:a="http://schemas.openxmlformats.org/drawingml/2006/main">
               <a:ext uri="{FF2B5EF4-FFF2-40B4-BE49-F238E27FC236}">
-                <a16:creationId xmlns:a16="http://schemas.microsoft.com/office/drawing/2014/main" id="{413BF42B-47AC-4A8D-9892-009A8FE8D2EE}"/>
+                <a16:creationId xmlns:a16="http://schemas.microsoft.com/office/drawing/2014/main" id="{6A5283A5-8E27-4F42-90E6-D16E44400BEF}"/>
               </a:ext>
             </a:extLst>
           </p:cNvPr>
@@ -5695,7 +5867,7 @@
           <p:nvPr/>
         </p:nvPicPr>
         <p:blipFill>
-          <a:blip xmlns:r="http://schemas.openxmlformats.org/officeDocument/2006/relationships" xmlns:a="http://schemas.openxmlformats.org/drawingml/2006/main" r:embed="Re1be276fdf0d46ef"/>
+          <a:blip xmlns:r="http://schemas.openxmlformats.org/officeDocument/2006/relationships" xmlns:a="http://schemas.openxmlformats.org/drawingml/2006/main" r:embed="R9a54e348c4504724"/>
           <a:stretch xmlns:a="http://schemas.openxmlformats.org/drawingml/2006/main"/>
         </p:blipFill>
         <p:spPr>
@@ -5711,7 +5883,7 @@
     </p:spTree>
     <p:extLst>
       <p:ext uri="{BB962C8B-B14F-4D97-AF65-F5344CB8AC3E}">
-        <p14:creationId xmlns:p14="http://schemas.microsoft.com/office/powerpoint/2010/main" val="1760308090"/>
+        <p14:creationId xmlns:p14="http://schemas.microsoft.com/office/powerpoint/2010/main" val="173329987"/>
       </p:ext>
     </p:extLst>
   </p:cSld>
@@ -5739,10 +5911,10 @@
       </p:grpSpPr>
       <p:sp>
         <p:nvSpPr>
-          <p:cNvPr id="11" name="">
+          <p:cNvPr id="12" name="">
             <a:extLst xmlns:a="http://schemas.openxmlformats.org/drawingml/2006/main">
               <a:ext uri="{FF2B5EF4-FFF2-40B4-BE49-F238E27FC236}">
-                <a16:creationId xmlns:a16="http://schemas.microsoft.com/office/drawing/2014/main" id="{6D7FC5AE-6C2B-430B-8068-A41F408C8BE9}"/>
+                <a16:creationId xmlns:a16="http://schemas.microsoft.com/office/drawing/2014/main" id="{700735E2-6C0C-4977-AE5F-FD652F62500C}"/>
               </a:ext>
             </a:extLst>
           </p:cNvPr>
@@ -5798,7 +5970,7 @@
                 <a:ea typeface="Arial"/>
                 <a:cs typeface="Arial"/>
               </a:rPr>
-              <a:t>Өөрийн зарын туршилт</a:t>
+              <a:t>Хэрэгтэй зүйлээ хайх</a:t>
             </a:r>
           </a:p>
         </p:txBody>
@@ -5808,7 +5980,7 @@
           <p:cNvPr id="2" name="">
             <a:extLst xmlns:a="http://schemas.openxmlformats.org/drawingml/2006/main">
               <a:ext uri="{FF2B5EF4-FFF2-40B4-BE49-F238E27FC236}">
-                <a16:creationId xmlns:a16="http://schemas.microsoft.com/office/drawing/2014/main" id="{2F3C68E5-7CBA-4E8C-AF01-30FB75A0BF26}"/>
+                <a16:creationId xmlns:a16="http://schemas.microsoft.com/office/drawing/2014/main" id="{49D55836-9854-460C-8918-99064BEE16CA}"/>
               </a:ext>
             </a:extLst>
           </p:cNvPr>
@@ -5819,7 +5991,7 @@
         </p:nvSpPr>
         <p:spPr>
           <a:xfrm xmlns:a="http://schemas.openxmlformats.org/drawingml/2006/main">
-            <a:off x="647700" y="1619250"/>
+            <a:off x="647700" y="1676400"/>
             <a:ext cx="552450" cy="495300"/>
           </a:xfrm>
           <a:prstGeom xmlns:a="http://schemas.openxmlformats.org/drawingml/2006/main" prst="rect">
@@ -5874,7 +6046,7 @@
           <p:cNvPr id="3" name="">
             <a:extLst xmlns:a="http://schemas.openxmlformats.org/drawingml/2006/main">
               <a:ext uri="{FF2B5EF4-FFF2-40B4-BE49-F238E27FC236}">
-                <a16:creationId xmlns:a16="http://schemas.microsoft.com/office/drawing/2014/main" id="{274650C4-1653-4B9F-9CB5-33016831D601}"/>
+                <a16:creationId xmlns:a16="http://schemas.microsoft.com/office/drawing/2014/main" id="{BB821D18-A3FF-4A67-8406-FE8123822755}"/>
               </a:ext>
             </a:extLst>
           </p:cNvPr>
@@ -5885,7 +6057,7 @@
         </p:nvSpPr>
         <p:spPr>
           <a:xfrm xmlns:a="http://schemas.openxmlformats.org/drawingml/2006/main">
-            <a:off x="1371600" y="1619250"/>
+            <a:off x="1371600" y="1676400"/>
             <a:ext cx="7143750" cy="438150"/>
           </a:xfrm>
           <a:prstGeom xmlns:a="http://schemas.openxmlformats.org/drawingml/2006/main" prst="rect">
@@ -5930,7 +6102,7 @@
                 <a:ea typeface="Arial"/>
                 <a:cs typeface="Arial"/>
               </a:rPr>
-              <a:t>Зар оруулах</a:t>
+              <a:t>Хайлт ба ангилал</a:t>
             </a:r>
           </a:p>
         </p:txBody>
@@ -5940,7 +6112,7 @@
           <p:cNvPr id="4" name="">
             <a:extLst xmlns:a="http://schemas.openxmlformats.org/drawingml/2006/main">
               <a:ext uri="{FF2B5EF4-FFF2-40B4-BE49-F238E27FC236}">
-                <a16:creationId xmlns:a16="http://schemas.microsoft.com/office/drawing/2014/main" id="{BC19A631-9771-445A-B877-7D613ABD58C1}"/>
+                <a16:creationId xmlns:a16="http://schemas.microsoft.com/office/drawing/2014/main" id="{DABA6C9E-EAD0-4DD9-B3DA-1A63F8866272}"/>
               </a:ext>
             </a:extLst>
           </p:cNvPr>
@@ -5951,7 +6123,7 @@
         </p:nvSpPr>
         <p:spPr>
           <a:xfrm xmlns:a="http://schemas.openxmlformats.org/drawingml/2006/main">
-            <a:off x="1371600" y="2114550"/>
+            <a:off x="1371600" y="2171700"/>
             <a:ext cx="7143750" cy="819150"/>
           </a:xfrm>
           <a:prstGeom xmlns:a="http://schemas.openxmlformats.org/drawingml/2006/main" prst="rect">
@@ -5996,7 +6168,7 @@
                 <a:ea typeface="Arial"/>
                 <a:cs typeface="Arial"/>
               </a:rPr>
-              <a:t>Өөрийн бодит эд зүйлийн зураг, тайлбар,</a:t>
+              <a:t>Камер, дугуй, майхан зэрэг өөрт хэрэгтэй</a:t>
             </a:r>
           </a:p>
           <a:p xmlns:a="http://schemas.openxmlformats.org/drawingml/2006/main">
@@ -6019,7 +6191,7 @@
                 <a:ea typeface="Arial"/>
                 <a:cs typeface="Arial"/>
               </a:rPr>
-              <a:t>түрээсийн үнэ болон мэдээллийг оруулна.</a:t>
+              <a:t>зүйлээ хайж, ангиллаар шүүнэ.</a:t>
             </a:r>
           </a:p>
         </p:txBody>
@@ -6029,7 +6201,7 @@
           <p:cNvPr id="5" name="">
             <a:extLst xmlns:a="http://schemas.openxmlformats.org/drawingml/2006/main">
               <a:ext uri="{FF2B5EF4-FFF2-40B4-BE49-F238E27FC236}">
-                <a16:creationId xmlns:a16="http://schemas.microsoft.com/office/drawing/2014/main" id="{4039AE2D-18C4-4EED-BCAD-F8F73EB3FCAF}"/>
+                <a16:creationId xmlns:a16="http://schemas.microsoft.com/office/drawing/2014/main" id="{47DBAB32-DB9A-42E3-A523-C0EBB6DC9E19}"/>
               </a:ext>
             </a:extLst>
           </p:cNvPr>
@@ -6040,7 +6212,7 @@
         </p:nvSpPr>
         <p:spPr>
           <a:xfrm xmlns:a="http://schemas.openxmlformats.org/drawingml/2006/main">
-            <a:off x="647700" y="3133725"/>
+            <a:off x="647700" y="3209925"/>
             <a:ext cx="552450" cy="495300"/>
           </a:xfrm>
           <a:prstGeom xmlns:a="http://schemas.openxmlformats.org/drawingml/2006/main" prst="rect">
@@ -6095,7 +6267,7 @@
           <p:cNvPr id="6" name="">
             <a:extLst xmlns:a="http://schemas.openxmlformats.org/drawingml/2006/main">
               <a:ext uri="{FF2B5EF4-FFF2-40B4-BE49-F238E27FC236}">
-                <a16:creationId xmlns:a16="http://schemas.microsoft.com/office/drawing/2014/main" id="{782337EB-3D82-4632-B743-BB5980C6A703}"/>
+                <a16:creationId xmlns:a16="http://schemas.microsoft.com/office/drawing/2014/main" id="{AF745AF0-D0CB-4641-BA0B-A36698D0261B}"/>
               </a:ext>
             </a:extLst>
           </p:cNvPr>
@@ -6106,7 +6278,7 @@
         </p:nvSpPr>
         <p:spPr>
           <a:xfrm xmlns:a="http://schemas.openxmlformats.org/drawingml/2006/main">
-            <a:off x="1371600" y="3133725"/>
+            <a:off x="1371600" y="3209925"/>
             <a:ext cx="7143750" cy="438150"/>
           </a:xfrm>
           <a:prstGeom xmlns:a="http://schemas.openxmlformats.org/drawingml/2006/main" prst="rect">
@@ -6151,7 +6323,7 @@
                 <a:ea typeface="Arial"/>
                 <a:cs typeface="Arial"/>
               </a:rPr>
-              <a:t>Миний зарууд</a:t>
+              <a:t>Ойролцоох зар</a:t>
             </a:r>
           </a:p>
         </p:txBody>
@@ -6161,7 +6333,7 @@
           <p:cNvPr id="7" name="">
             <a:extLst xmlns:a="http://schemas.openxmlformats.org/drawingml/2006/main">
               <a:ext uri="{FF2B5EF4-FFF2-40B4-BE49-F238E27FC236}">
-                <a16:creationId xmlns:a16="http://schemas.microsoft.com/office/drawing/2014/main" id="{D6ECE462-37DE-4417-9C5B-E79FB569A856}"/>
+                <a16:creationId xmlns:a16="http://schemas.microsoft.com/office/drawing/2014/main" id="{3CC325B5-425B-4336-A100-F7946F896155}"/>
               </a:ext>
             </a:extLst>
           </p:cNvPr>
@@ -6172,7 +6344,7 @@
         </p:nvSpPr>
         <p:spPr>
           <a:xfrm xmlns:a="http://schemas.openxmlformats.org/drawingml/2006/main">
-            <a:off x="1371600" y="3629025"/>
+            <a:off x="1371600" y="3705225"/>
             <a:ext cx="7143750" cy="819150"/>
           </a:xfrm>
           <a:prstGeom xmlns:a="http://schemas.openxmlformats.org/drawingml/2006/main" prst="rect">
@@ -6217,7 +6389,7 @@
                 <a:ea typeface="Arial"/>
                 <a:cs typeface="Arial"/>
               </a:rPr>
-              <a:t>Зараа харах, түр идэвхгүй болгох,</a:t>
+              <a:t>Байршлын хэсгээр өөрт ойр байгаа</a:t>
             </a:r>
           </a:p>
           <a:p xmlns:a="http://schemas.openxmlformats.org/drawingml/2006/main">
@@ -6240,7 +6412,7 @@
                 <a:ea typeface="Arial"/>
                 <a:cs typeface="Arial"/>
               </a:rPr>
-              <a:t>дахин идэвхжүүлэх үйлдлийг туршина.</a:t>
+              <a:t>түрээсийн заруудыг үзнэ.</a:t>
             </a:r>
           </a:p>
         </p:txBody>
@@ -6250,7 +6422,7 @@
           <p:cNvPr id="8" name="">
             <a:extLst xmlns:a="http://schemas.openxmlformats.org/drawingml/2006/main">
               <a:ext uri="{FF2B5EF4-FFF2-40B4-BE49-F238E27FC236}">
-                <a16:creationId xmlns:a16="http://schemas.microsoft.com/office/drawing/2014/main" id="{E4635229-2C39-40D7-BD62-258946D11440}"/>
+                <a16:creationId xmlns:a16="http://schemas.microsoft.com/office/drawing/2014/main" id="{185F3A96-10F5-44AC-B85D-F080DB3BBDAF}"/>
               </a:ext>
             </a:extLst>
           </p:cNvPr>
@@ -6261,8 +6433,8 @@
         </p:nvSpPr>
         <p:spPr>
           <a:xfrm xmlns:a="http://schemas.openxmlformats.org/drawingml/2006/main">
-            <a:off x="1371600" y="4772025"/>
-            <a:ext cx="6953250" cy="419100"/>
+            <a:off x="647700" y="4743450"/>
+            <a:ext cx="552450" cy="495300"/>
           </a:xfrm>
           <a:prstGeom xmlns:a="http://schemas.openxmlformats.org/drawingml/2006/main" prst="rect">
             <a:avLst/>
@@ -6276,7 +6448,7 @@
           <a:bodyPr xmlns:a="http://schemas.openxmlformats.org/drawingml/2006/main"/>
           <a:lstStyle xmlns:a="http://schemas.openxmlformats.org/drawingml/2006/main">
             <a:defPPr>
-              <a:defRPr sz="2175" b="1">
+              <a:defRPr sz="2550" b="1">
                 <a:solidFill>
                   <a:srgbClr val="7409B7"/>
                 </a:solidFill>
@@ -6288,7 +6460,7 @@
           </a:lstStyle>
           <a:p xmlns:a="http://schemas.openxmlformats.org/drawingml/2006/main">
             <a:pPr>
-              <a:defRPr sz="2175" b="1">
+              <a:defRPr sz="2550" b="1">
                 <a:solidFill>
                   <a:srgbClr val="7409B7"/>
                 </a:solidFill>
@@ -6298,7 +6470,7 @@
               </a:defRPr>
             </a:pPr>
             <a:r>
-              <a:rPr sz="2175" b="1">
+              <a:rPr sz="2550" b="1">
                 <a:solidFill>
                   <a:srgbClr val="7409B7"/>
                 </a:solidFill>
@@ -6306,7 +6478,7 @@
                 <a:ea typeface="Arial"/>
                 <a:cs typeface="Arial"/>
               </a:rPr>
-              <a:t>Төлбөртэй үйлдэл</a:t>
+              <a:t>03</a:t>
             </a:r>
           </a:p>
         </p:txBody>
@@ -6316,7 +6488,7 @@
           <p:cNvPr id="9" name="">
             <a:extLst xmlns:a="http://schemas.openxmlformats.org/drawingml/2006/main">
               <a:ext uri="{FF2B5EF4-FFF2-40B4-BE49-F238E27FC236}">
-                <a16:creationId xmlns:a16="http://schemas.microsoft.com/office/drawing/2014/main" id="{AB88075A-CEF7-418E-ABF2-F4AFAE7778AB}"/>
+                <a16:creationId xmlns:a16="http://schemas.microsoft.com/office/drawing/2014/main" id="{793D6659-42CB-41DA-900B-6F9C03CB26D5}"/>
               </a:ext>
             </a:extLst>
           </p:cNvPr>
@@ -6327,8 +6499,8 @@
         </p:nvSpPr>
         <p:spPr>
           <a:xfrm xmlns:a="http://schemas.openxmlformats.org/drawingml/2006/main">
-            <a:off x="1371600" y="5238750"/>
-            <a:ext cx="6953250" cy="1085850"/>
+            <a:off x="1371600" y="4743450"/>
+            <a:ext cx="7143750" cy="438150"/>
           </a:xfrm>
           <a:prstGeom xmlns:a="http://schemas.openxmlformats.org/drawingml/2006/main" prst="rect">
             <a:avLst/>
@@ -6342,7 +6514,7 @@
           <a:bodyPr xmlns:a="http://schemas.openxmlformats.org/drawingml/2006/main"/>
           <a:lstStyle xmlns:a="http://schemas.openxmlformats.org/drawingml/2006/main">
             <a:defPPr>
-              <a:defRPr sz="1875" b="0">
+              <a:defRPr sz="2175" b="1">
                 <a:solidFill>
                   <a:srgbClr val="251B35"/>
                 </a:solidFill>
@@ -6354,81 +6526,124 @@
           </a:lstStyle>
           <a:p xmlns:a="http://schemas.openxmlformats.org/drawingml/2006/main">
             <a:pPr>
-              <a:defRPr sz="1875" b="0">
-                <a:solidFill>
-                  <a:srgbClr val="251B35"/>
-                </a:solidFill>
-                <a:latin typeface="Arial"/>
-                <a:ea typeface="Arial"/>
-                <a:cs typeface="Arial"/>
-              </a:defRPr>
-            </a:pPr>
-            <a:r>
-              <a:rPr sz="1875" b="0">
-                <a:solidFill>
-                  <a:srgbClr val="251B35"/>
-                </a:solidFill>
-                <a:latin typeface="Arial"/>
-                <a:ea typeface="Arial"/>
-                <a:cs typeface="Arial"/>
-              </a:rPr>
-              <a:t>Зарын эрх, Pump, Sponsored нь төлбөртэй.</a:t>
-            </a:r>
-          </a:p>
-          <a:p xmlns:a="http://schemas.openxmlformats.org/drawingml/2006/main">
-            <a:pPr>
-              <a:defRPr sz="1875" b="0">
-                <a:solidFill>
-                  <a:srgbClr val="251B35"/>
-                </a:solidFill>
-                <a:latin typeface="Arial"/>
-                <a:ea typeface="Arial"/>
-                <a:cs typeface="Arial"/>
-              </a:defRPr>
-            </a:pPr>
-            <a:r>
-              <a:rPr sz="1875" b="0">
-                <a:solidFill>
-                  <a:srgbClr val="251B35"/>
-                </a:solidFill>
-                <a:latin typeface="Arial"/>
-                <a:ea typeface="Arial"/>
-                <a:cs typeface="Arial"/>
-              </a:rPr>
-              <a:t>Туршилтад оролцохын тулд бодит төлбөр</a:t>
-            </a:r>
-          </a:p>
-          <a:p xmlns:a="http://schemas.openxmlformats.org/drawingml/2006/main">
-            <a:pPr>
-              <a:defRPr sz="1875" b="0">
-                <a:solidFill>
-                  <a:srgbClr val="251B35"/>
-                </a:solidFill>
-                <a:latin typeface="Arial"/>
-                <a:ea typeface="Arial"/>
-                <a:cs typeface="Arial"/>
-              </a:defRPr>
-            </a:pPr>
-            <a:r>
-              <a:rPr sz="1875" b="0">
-                <a:solidFill>
-                  <a:srgbClr val="251B35"/>
-                </a:solidFill>
-                <a:latin typeface="Arial"/>
-                <a:ea typeface="Arial"/>
-                <a:cs typeface="Arial"/>
-              </a:rPr>
-              <a:t>хийх шаардлагагүй.</a:t>
-            </a:r>
-          </a:p>
-        </p:txBody>
-      </p:sp>
-      <p:pic>
-        <p:nvPicPr>
+              <a:defRPr sz="2175" b="1">
+                <a:solidFill>
+                  <a:srgbClr val="251B35"/>
+                </a:solidFill>
+                <a:latin typeface="Arial"/>
+                <a:ea typeface="Arial"/>
+                <a:cs typeface="Arial"/>
+              </a:defRPr>
+            </a:pPr>
+            <a:r>
+              <a:rPr sz="2175" b="1">
+                <a:solidFill>
+                  <a:srgbClr val="251B35"/>
+                </a:solidFill>
+                <a:latin typeface="Arial"/>
+                <a:ea typeface="Arial"/>
+                <a:cs typeface="Arial"/>
+              </a:rPr>
+              <a:t>Зарын дэлгэрэнгүй</a:t>
+            </a:r>
+          </a:p>
+        </p:txBody>
+      </p:sp>
+      <p:sp>
+        <p:nvSpPr>
           <p:cNvPr id="10" name="">
             <a:extLst xmlns:a="http://schemas.openxmlformats.org/drawingml/2006/main">
               <a:ext uri="{FF2B5EF4-FFF2-40B4-BE49-F238E27FC236}">
-                <a16:creationId xmlns:a16="http://schemas.microsoft.com/office/drawing/2014/main" id="{889FD876-FF38-44E5-8C83-DCB9405FD2BA}"/>
+                <a16:creationId xmlns:a16="http://schemas.microsoft.com/office/drawing/2014/main" id="{99C38E39-693C-4154-B3D5-0F72BDE36717}"/>
+              </a:ext>
+            </a:extLst>
+          </p:cNvPr>
+          <p:cNvSpPr>
+            <a:spLocks xmlns:a="http://schemas.openxmlformats.org/drawingml/2006/main" noGrp="1"/>
+          </p:cNvSpPr>
+          <p:nvPr/>
+        </p:nvSpPr>
+        <p:spPr>
+          <a:xfrm xmlns:a="http://schemas.openxmlformats.org/drawingml/2006/main">
+            <a:off x="1371600" y="5238750"/>
+            <a:ext cx="7143750" cy="819150"/>
+          </a:xfrm>
+          <a:prstGeom xmlns:a="http://schemas.openxmlformats.org/drawingml/2006/main" prst="rect">
+            <a:avLst/>
+          </a:prstGeom>
+          <a:noFill xmlns:a="http://schemas.openxmlformats.org/drawingml/2006/main"/>
+          <a:ln xmlns:a="http://schemas.openxmlformats.org/drawingml/2006/main" w="0">
+            <a:noFill/>
+          </a:ln>
+        </p:spPr>
+        <p:txBody>
+          <a:bodyPr xmlns:a="http://schemas.openxmlformats.org/drawingml/2006/main"/>
+          <a:lstStyle xmlns:a="http://schemas.openxmlformats.org/drawingml/2006/main">
+            <a:defPPr>
+              <a:defRPr sz="1875" b="0">
+                <a:solidFill>
+                  <a:srgbClr val="251B35"/>
+                </a:solidFill>
+                <a:latin typeface="Arial"/>
+                <a:ea typeface="Arial"/>
+                <a:cs typeface="Arial"/>
+              </a:defRPr>
+            </a:defPPr>
+          </a:lstStyle>
+          <a:p xmlns:a="http://schemas.openxmlformats.org/drawingml/2006/main">
+            <a:pPr>
+              <a:defRPr sz="1875" b="0">
+                <a:solidFill>
+                  <a:srgbClr val="251B35"/>
+                </a:solidFill>
+                <a:latin typeface="Arial"/>
+                <a:ea typeface="Arial"/>
+                <a:cs typeface="Arial"/>
+              </a:defRPr>
+            </a:pPr>
+            <a:r>
+              <a:rPr sz="1875" b="0">
+                <a:solidFill>
+                  <a:srgbClr val="251B35"/>
+                </a:solidFill>
+                <a:latin typeface="Arial"/>
+                <a:ea typeface="Arial"/>
+                <a:cs typeface="Arial"/>
+              </a:rPr>
+              <a:t>Үнэ, зураг, тайлбарыг шалгаад</a:t>
+            </a:r>
+          </a:p>
+          <a:p xmlns:a="http://schemas.openxmlformats.org/drawingml/2006/main">
+            <a:pPr>
+              <a:defRPr sz="1875" b="0">
+                <a:solidFill>
+                  <a:srgbClr val="251B35"/>
+                </a:solidFill>
+                <a:latin typeface="Arial"/>
+                <a:ea typeface="Arial"/>
+                <a:cs typeface="Arial"/>
+              </a:defRPr>
+            </a:pPr>
+            <a:r>
+              <a:rPr sz="1875" b="0">
+                <a:solidFill>
+                  <a:srgbClr val="251B35"/>
+                </a:solidFill>
+                <a:latin typeface="Arial"/>
+                <a:ea typeface="Arial"/>
+                <a:cs typeface="Arial"/>
+              </a:rPr>
+              <a:t>сонирхсон зараа хадгалж үзнэ.</a:t>
+            </a:r>
+          </a:p>
+        </p:txBody>
+      </p:sp>
+      <p:pic>
+        <p:nvPicPr>
+          <p:cNvPr id="11" name="">
+            <a:extLst xmlns:a="http://schemas.openxmlformats.org/drawingml/2006/main">
+              <a:ext uri="{FF2B5EF4-FFF2-40B4-BE49-F238E27FC236}">
+                <a16:creationId xmlns:a16="http://schemas.microsoft.com/office/drawing/2014/main" id="{FE31CB12-AAE5-4AF0-B00B-171D35DDE9E1}"/>
               </a:ext>
             </a:extLst>
           </p:cNvPr>
@@ -6438,7 +6653,7 @@
           <p:nvPr/>
         </p:nvPicPr>
         <p:blipFill>
-          <a:blip xmlns:r="http://schemas.openxmlformats.org/officeDocument/2006/relationships" xmlns:a="http://schemas.openxmlformats.org/drawingml/2006/main" r:embed="Rb1f14b0a2b804fca"/>
+          <a:blip xmlns:r="http://schemas.openxmlformats.org/officeDocument/2006/relationships" xmlns:a="http://schemas.openxmlformats.org/drawingml/2006/main" r:embed="R970ac274de4b4656"/>
           <a:stretch xmlns:a="http://schemas.openxmlformats.org/drawingml/2006/main"/>
         </p:blipFill>
         <p:spPr>
@@ -6454,7 +6669,7 @@
     </p:spTree>
     <p:extLst>
       <p:ext uri="{BB962C8B-B14F-4D97-AF65-F5344CB8AC3E}">
-        <p14:creationId xmlns:p14="http://schemas.microsoft.com/office/powerpoint/2010/main" val="2029552350"/>
+        <p14:creationId xmlns:p14="http://schemas.microsoft.com/office/powerpoint/2010/main" val="1598790633"/>
       </p:ext>
     </p:extLst>
   </p:cSld>
@@ -6482,10 +6697,10 @@
       </p:grpSpPr>
       <p:sp>
         <p:nvSpPr>
-          <p:cNvPr id="10" name="">
+          <p:cNvPr id="11" name="">
             <a:extLst xmlns:a="http://schemas.openxmlformats.org/drawingml/2006/main">
               <a:ext uri="{FF2B5EF4-FFF2-40B4-BE49-F238E27FC236}">
-                <a16:creationId xmlns:a16="http://schemas.microsoft.com/office/drawing/2014/main" id="{133D601A-9A23-4954-9C13-721D56499BD7}"/>
+                <a16:creationId xmlns:a16="http://schemas.microsoft.com/office/drawing/2014/main" id="{09C281A0-F699-487D-BC42-49AA552CFFF4}"/>
               </a:ext>
             </a:extLst>
           </p:cNvPr>
@@ -6541,7 +6756,7 @@
                 <a:ea typeface="Arial"/>
                 <a:cs typeface="Arial"/>
               </a:rPr>
-              <a:t>Алдаа ба санал хүсэлт</a:t>
+              <a:t>Өөрийн зарын туршилт</a:t>
             </a:r>
           </a:p>
         </p:txBody>
@@ -6551,7 +6766,1640 @@
           <p:cNvPr id="2" name="">
             <a:extLst xmlns:a="http://schemas.openxmlformats.org/drawingml/2006/main">
               <a:ext uri="{FF2B5EF4-FFF2-40B4-BE49-F238E27FC236}">
-                <a16:creationId xmlns:a16="http://schemas.microsoft.com/office/drawing/2014/main" id="{8506AC9B-7816-4BD4-B074-3D7A731BD83D}"/>
+                <a16:creationId xmlns:a16="http://schemas.microsoft.com/office/drawing/2014/main" id="{F7BF88B8-437B-4302-862E-95AC71940863}"/>
+              </a:ext>
+            </a:extLst>
+          </p:cNvPr>
+          <p:cNvSpPr>
+            <a:spLocks xmlns:a="http://schemas.openxmlformats.org/drawingml/2006/main" noGrp="1"/>
+          </p:cNvSpPr>
+          <p:nvPr/>
+        </p:nvSpPr>
+        <p:spPr>
+          <a:xfrm xmlns:a="http://schemas.openxmlformats.org/drawingml/2006/main">
+            <a:off x="647700" y="1619250"/>
+            <a:ext cx="552450" cy="495300"/>
+          </a:xfrm>
+          <a:prstGeom xmlns:a="http://schemas.openxmlformats.org/drawingml/2006/main" prst="rect">
+            <a:avLst/>
+          </a:prstGeom>
+          <a:noFill xmlns:a="http://schemas.openxmlformats.org/drawingml/2006/main"/>
+          <a:ln xmlns:a="http://schemas.openxmlformats.org/drawingml/2006/main" w="0">
+            <a:noFill/>
+          </a:ln>
+        </p:spPr>
+        <p:txBody>
+          <a:bodyPr xmlns:a="http://schemas.openxmlformats.org/drawingml/2006/main"/>
+          <a:lstStyle xmlns:a="http://schemas.openxmlformats.org/drawingml/2006/main">
+            <a:defPPr>
+              <a:defRPr sz="2550" b="1">
+                <a:solidFill>
+                  <a:srgbClr val="7409B7"/>
+                </a:solidFill>
+                <a:latin typeface="Arial"/>
+                <a:ea typeface="Arial"/>
+                <a:cs typeface="Arial"/>
+              </a:defRPr>
+            </a:defPPr>
+          </a:lstStyle>
+          <a:p xmlns:a="http://schemas.openxmlformats.org/drawingml/2006/main">
+            <a:pPr>
+              <a:defRPr sz="2550" b="1">
+                <a:solidFill>
+                  <a:srgbClr val="7409B7"/>
+                </a:solidFill>
+                <a:latin typeface="Arial"/>
+                <a:ea typeface="Arial"/>
+                <a:cs typeface="Arial"/>
+              </a:defRPr>
+            </a:pPr>
+            <a:r>
+              <a:rPr sz="2550" b="1">
+                <a:solidFill>
+                  <a:srgbClr val="7409B7"/>
+                </a:solidFill>
+                <a:latin typeface="Arial"/>
+                <a:ea typeface="Arial"/>
+                <a:cs typeface="Arial"/>
+              </a:rPr>
+              <a:t>01</a:t>
+            </a:r>
+          </a:p>
+        </p:txBody>
+      </p:sp>
+      <p:sp>
+        <p:nvSpPr>
+          <p:cNvPr id="3" name="">
+            <a:extLst xmlns:a="http://schemas.openxmlformats.org/drawingml/2006/main">
+              <a:ext uri="{FF2B5EF4-FFF2-40B4-BE49-F238E27FC236}">
+                <a16:creationId xmlns:a16="http://schemas.microsoft.com/office/drawing/2014/main" id="{8ED30487-43A9-4E05-BA67-1B0DA8B9150C}"/>
+              </a:ext>
+            </a:extLst>
+          </p:cNvPr>
+          <p:cNvSpPr>
+            <a:spLocks xmlns:a="http://schemas.openxmlformats.org/drawingml/2006/main" noGrp="1"/>
+          </p:cNvSpPr>
+          <p:nvPr/>
+        </p:nvSpPr>
+        <p:spPr>
+          <a:xfrm xmlns:a="http://schemas.openxmlformats.org/drawingml/2006/main">
+            <a:off x="1371600" y="1619250"/>
+            <a:ext cx="7143750" cy="438150"/>
+          </a:xfrm>
+          <a:prstGeom xmlns:a="http://schemas.openxmlformats.org/drawingml/2006/main" prst="rect">
+            <a:avLst/>
+          </a:prstGeom>
+          <a:noFill xmlns:a="http://schemas.openxmlformats.org/drawingml/2006/main"/>
+          <a:ln xmlns:a="http://schemas.openxmlformats.org/drawingml/2006/main" w="0">
+            <a:noFill/>
+          </a:ln>
+        </p:spPr>
+        <p:txBody>
+          <a:bodyPr xmlns:a="http://schemas.openxmlformats.org/drawingml/2006/main"/>
+          <a:lstStyle xmlns:a="http://schemas.openxmlformats.org/drawingml/2006/main">
+            <a:defPPr>
+              <a:defRPr sz="2175" b="1">
+                <a:solidFill>
+                  <a:srgbClr val="251B35"/>
+                </a:solidFill>
+                <a:latin typeface="Arial"/>
+                <a:ea typeface="Arial"/>
+                <a:cs typeface="Arial"/>
+              </a:defRPr>
+            </a:defPPr>
+          </a:lstStyle>
+          <a:p xmlns:a="http://schemas.openxmlformats.org/drawingml/2006/main">
+            <a:pPr>
+              <a:defRPr sz="2175" b="1">
+                <a:solidFill>
+                  <a:srgbClr val="251B35"/>
+                </a:solidFill>
+                <a:latin typeface="Arial"/>
+                <a:ea typeface="Arial"/>
+                <a:cs typeface="Arial"/>
+              </a:defRPr>
+            </a:pPr>
+            <a:r>
+              <a:rPr sz="2175" b="1">
+                <a:solidFill>
+                  <a:srgbClr val="251B35"/>
+                </a:solidFill>
+                <a:latin typeface="Arial"/>
+                <a:ea typeface="Arial"/>
+                <a:cs typeface="Arial"/>
+              </a:rPr>
+              <a:t>Зар оруулах</a:t>
+            </a:r>
+          </a:p>
+        </p:txBody>
+      </p:sp>
+      <p:sp>
+        <p:nvSpPr>
+          <p:cNvPr id="4" name="">
+            <a:extLst xmlns:a="http://schemas.openxmlformats.org/drawingml/2006/main">
+              <a:ext uri="{FF2B5EF4-FFF2-40B4-BE49-F238E27FC236}">
+                <a16:creationId xmlns:a16="http://schemas.microsoft.com/office/drawing/2014/main" id="{F350C470-74DD-4F30-9D02-90E72D2D519C}"/>
+              </a:ext>
+            </a:extLst>
+          </p:cNvPr>
+          <p:cNvSpPr>
+            <a:spLocks xmlns:a="http://schemas.openxmlformats.org/drawingml/2006/main" noGrp="1"/>
+          </p:cNvSpPr>
+          <p:nvPr/>
+        </p:nvSpPr>
+        <p:spPr>
+          <a:xfrm xmlns:a="http://schemas.openxmlformats.org/drawingml/2006/main">
+            <a:off x="1371600" y="2114550"/>
+            <a:ext cx="7143750" cy="819150"/>
+          </a:xfrm>
+          <a:prstGeom xmlns:a="http://schemas.openxmlformats.org/drawingml/2006/main" prst="rect">
+            <a:avLst/>
+          </a:prstGeom>
+          <a:noFill xmlns:a="http://schemas.openxmlformats.org/drawingml/2006/main"/>
+          <a:ln xmlns:a="http://schemas.openxmlformats.org/drawingml/2006/main" w="0">
+            <a:noFill/>
+          </a:ln>
+        </p:spPr>
+        <p:txBody>
+          <a:bodyPr xmlns:a="http://schemas.openxmlformats.org/drawingml/2006/main"/>
+          <a:lstStyle xmlns:a="http://schemas.openxmlformats.org/drawingml/2006/main">
+            <a:defPPr>
+              <a:defRPr sz="1875" b="0">
+                <a:solidFill>
+                  <a:srgbClr val="251B35"/>
+                </a:solidFill>
+                <a:latin typeface="Arial"/>
+                <a:ea typeface="Arial"/>
+                <a:cs typeface="Arial"/>
+              </a:defRPr>
+            </a:defPPr>
+          </a:lstStyle>
+          <a:p xmlns:a="http://schemas.openxmlformats.org/drawingml/2006/main">
+            <a:pPr>
+              <a:defRPr sz="1875" b="0">
+                <a:solidFill>
+                  <a:srgbClr val="251B35"/>
+                </a:solidFill>
+                <a:latin typeface="Arial"/>
+                <a:ea typeface="Arial"/>
+                <a:cs typeface="Arial"/>
+              </a:defRPr>
+            </a:pPr>
+            <a:r>
+              <a:rPr sz="1875" b="0">
+                <a:solidFill>
+                  <a:srgbClr val="251B35"/>
+                </a:solidFill>
+                <a:latin typeface="Arial"/>
+                <a:ea typeface="Arial"/>
+                <a:cs typeface="Arial"/>
+              </a:rPr>
+              <a:t>Өөрийн бодит эд зүйлийн зураг, тайлбар,</a:t>
+            </a:r>
+          </a:p>
+          <a:p xmlns:a="http://schemas.openxmlformats.org/drawingml/2006/main">
+            <a:pPr>
+              <a:defRPr sz="1875" b="0">
+                <a:solidFill>
+                  <a:srgbClr val="251B35"/>
+                </a:solidFill>
+                <a:latin typeface="Arial"/>
+                <a:ea typeface="Arial"/>
+                <a:cs typeface="Arial"/>
+              </a:defRPr>
+            </a:pPr>
+            <a:r>
+              <a:rPr sz="1875" b="0">
+                <a:solidFill>
+                  <a:srgbClr val="251B35"/>
+                </a:solidFill>
+                <a:latin typeface="Arial"/>
+                <a:ea typeface="Arial"/>
+                <a:cs typeface="Arial"/>
+              </a:rPr>
+              <a:t>түрээсийн үнэ болон мэдээллийг оруулна.</a:t>
+            </a:r>
+          </a:p>
+        </p:txBody>
+      </p:sp>
+      <p:sp>
+        <p:nvSpPr>
+          <p:cNvPr id="5" name="">
+            <a:extLst xmlns:a="http://schemas.openxmlformats.org/drawingml/2006/main">
+              <a:ext uri="{FF2B5EF4-FFF2-40B4-BE49-F238E27FC236}">
+                <a16:creationId xmlns:a16="http://schemas.microsoft.com/office/drawing/2014/main" id="{1891D45F-DE9F-44AA-AE75-D23B57C36AF8}"/>
+              </a:ext>
+            </a:extLst>
+          </p:cNvPr>
+          <p:cNvSpPr>
+            <a:spLocks xmlns:a="http://schemas.openxmlformats.org/drawingml/2006/main" noGrp="1"/>
+          </p:cNvSpPr>
+          <p:nvPr/>
+        </p:nvSpPr>
+        <p:spPr>
+          <a:xfrm xmlns:a="http://schemas.openxmlformats.org/drawingml/2006/main">
+            <a:off x="647700" y="3133725"/>
+            <a:ext cx="552450" cy="495300"/>
+          </a:xfrm>
+          <a:prstGeom xmlns:a="http://schemas.openxmlformats.org/drawingml/2006/main" prst="rect">
+            <a:avLst/>
+          </a:prstGeom>
+          <a:noFill xmlns:a="http://schemas.openxmlformats.org/drawingml/2006/main"/>
+          <a:ln xmlns:a="http://schemas.openxmlformats.org/drawingml/2006/main" w="0">
+            <a:noFill/>
+          </a:ln>
+        </p:spPr>
+        <p:txBody>
+          <a:bodyPr xmlns:a="http://schemas.openxmlformats.org/drawingml/2006/main"/>
+          <a:lstStyle xmlns:a="http://schemas.openxmlformats.org/drawingml/2006/main">
+            <a:defPPr>
+              <a:defRPr sz="2550" b="1">
+                <a:solidFill>
+                  <a:srgbClr val="7409B7"/>
+                </a:solidFill>
+                <a:latin typeface="Arial"/>
+                <a:ea typeface="Arial"/>
+                <a:cs typeface="Arial"/>
+              </a:defRPr>
+            </a:defPPr>
+          </a:lstStyle>
+          <a:p xmlns:a="http://schemas.openxmlformats.org/drawingml/2006/main">
+            <a:pPr>
+              <a:defRPr sz="2550" b="1">
+                <a:solidFill>
+                  <a:srgbClr val="7409B7"/>
+                </a:solidFill>
+                <a:latin typeface="Arial"/>
+                <a:ea typeface="Arial"/>
+                <a:cs typeface="Arial"/>
+              </a:defRPr>
+            </a:pPr>
+            <a:r>
+              <a:rPr sz="2550" b="1">
+                <a:solidFill>
+                  <a:srgbClr val="7409B7"/>
+                </a:solidFill>
+                <a:latin typeface="Arial"/>
+                <a:ea typeface="Arial"/>
+                <a:cs typeface="Arial"/>
+              </a:rPr>
+              <a:t>02</a:t>
+            </a:r>
+          </a:p>
+        </p:txBody>
+      </p:sp>
+      <p:sp>
+        <p:nvSpPr>
+          <p:cNvPr id="6" name="">
+            <a:extLst xmlns:a="http://schemas.openxmlformats.org/drawingml/2006/main">
+              <a:ext uri="{FF2B5EF4-FFF2-40B4-BE49-F238E27FC236}">
+                <a16:creationId xmlns:a16="http://schemas.microsoft.com/office/drawing/2014/main" id="{1B168FB5-0B56-4CDC-AA19-DE106E43A0A6}"/>
+              </a:ext>
+            </a:extLst>
+          </p:cNvPr>
+          <p:cNvSpPr>
+            <a:spLocks xmlns:a="http://schemas.openxmlformats.org/drawingml/2006/main" noGrp="1"/>
+          </p:cNvSpPr>
+          <p:nvPr/>
+        </p:nvSpPr>
+        <p:spPr>
+          <a:xfrm xmlns:a="http://schemas.openxmlformats.org/drawingml/2006/main">
+            <a:off x="1371600" y="3133725"/>
+            <a:ext cx="7143750" cy="438150"/>
+          </a:xfrm>
+          <a:prstGeom xmlns:a="http://schemas.openxmlformats.org/drawingml/2006/main" prst="rect">
+            <a:avLst/>
+          </a:prstGeom>
+          <a:noFill xmlns:a="http://schemas.openxmlformats.org/drawingml/2006/main"/>
+          <a:ln xmlns:a="http://schemas.openxmlformats.org/drawingml/2006/main" w="0">
+            <a:noFill/>
+          </a:ln>
+        </p:spPr>
+        <p:txBody>
+          <a:bodyPr xmlns:a="http://schemas.openxmlformats.org/drawingml/2006/main"/>
+          <a:lstStyle xmlns:a="http://schemas.openxmlformats.org/drawingml/2006/main">
+            <a:defPPr>
+              <a:defRPr sz="2175" b="1">
+                <a:solidFill>
+                  <a:srgbClr val="251B35"/>
+                </a:solidFill>
+                <a:latin typeface="Arial"/>
+                <a:ea typeface="Arial"/>
+                <a:cs typeface="Arial"/>
+              </a:defRPr>
+            </a:defPPr>
+          </a:lstStyle>
+          <a:p xmlns:a="http://schemas.openxmlformats.org/drawingml/2006/main">
+            <a:pPr>
+              <a:defRPr sz="2175" b="1">
+                <a:solidFill>
+                  <a:srgbClr val="251B35"/>
+                </a:solidFill>
+                <a:latin typeface="Arial"/>
+                <a:ea typeface="Arial"/>
+                <a:cs typeface="Arial"/>
+              </a:defRPr>
+            </a:pPr>
+            <a:r>
+              <a:rPr sz="2175" b="1">
+                <a:solidFill>
+                  <a:srgbClr val="251B35"/>
+                </a:solidFill>
+                <a:latin typeface="Arial"/>
+                <a:ea typeface="Arial"/>
+                <a:cs typeface="Arial"/>
+              </a:rPr>
+              <a:t>Миний зарууд</a:t>
+            </a:r>
+          </a:p>
+        </p:txBody>
+      </p:sp>
+      <p:sp>
+        <p:nvSpPr>
+          <p:cNvPr id="7" name="">
+            <a:extLst xmlns:a="http://schemas.openxmlformats.org/drawingml/2006/main">
+              <a:ext uri="{FF2B5EF4-FFF2-40B4-BE49-F238E27FC236}">
+                <a16:creationId xmlns:a16="http://schemas.microsoft.com/office/drawing/2014/main" id="{B039C211-F250-47D4-8575-DE2F04172373}"/>
+              </a:ext>
+            </a:extLst>
+          </p:cNvPr>
+          <p:cNvSpPr>
+            <a:spLocks xmlns:a="http://schemas.openxmlformats.org/drawingml/2006/main" noGrp="1"/>
+          </p:cNvSpPr>
+          <p:nvPr/>
+        </p:nvSpPr>
+        <p:spPr>
+          <a:xfrm xmlns:a="http://schemas.openxmlformats.org/drawingml/2006/main">
+            <a:off x="1371600" y="3629025"/>
+            <a:ext cx="7143750" cy="819150"/>
+          </a:xfrm>
+          <a:prstGeom xmlns:a="http://schemas.openxmlformats.org/drawingml/2006/main" prst="rect">
+            <a:avLst/>
+          </a:prstGeom>
+          <a:noFill xmlns:a="http://schemas.openxmlformats.org/drawingml/2006/main"/>
+          <a:ln xmlns:a="http://schemas.openxmlformats.org/drawingml/2006/main" w="0">
+            <a:noFill/>
+          </a:ln>
+        </p:spPr>
+        <p:txBody>
+          <a:bodyPr xmlns:a="http://schemas.openxmlformats.org/drawingml/2006/main"/>
+          <a:lstStyle xmlns:a="http://schemas.openxmlformats.org/drawingml/2006/main">
+            <a:defPPr>
+              <a:defRPr sz="1875" b="0">
+                <a:solidFill>
+                  <a:srgbClr val="251B35"/>
+                </a:solidFill>
+                <a:latin typeface="Arial"/>
+                <a:ea typeface="Arial"/>
+                <a:cs typeface="Arial"/>
+              </a:defRPr>
+            </a:defPPr>
+          </a:lstStyle>
+          <a:p xmlns:a="http://schemas.openxmlformats.org/drawingml/2006/main">
+            <a:pPr>
+              <a:defRPr sz="1875" b="0">
+                <a:solidFill>
+                  <a:srgbClr val="251B35"/>
+                </a:solidFill>
+                <a:latin typeface="Arial"/>
+                <a:ea typeface="Arial"/>
+                <a:cs typeface="Arial"/>
+              </a:defRPr>
+            </a:pPr>
+            <a:r>
+              <a:rPr sz="1875" b="0">
+                <a:solidFill>
+                  <a:srgbClr val="251B35"/>
+                </a:solidFill>
+                <a:latin typeface="Arial"/>
+                <a:ea typeface="Arial"/>
+                <a:cs typeface="Arial"/>
+              </a:rPr>
+              <a:t>Зараа харах, түр идэвхгүй болгох,</a:t>
+            </a:r>
+          </a:p>
+          <a:p xmlns:a="http://schemas.openxmlformats.org/drawingml/2006/main">
+            <a:pPr>
+              <a:defRPr sz="1875" b="0">
+                <a:solidFill>
+                  <a:srgbClr val="251B35"/>
+                </a:solidFill>
+                <a:latin typeface="Arial"/>
+                <a:ea typeface="Arial"/>
+                <a:cs typeface="Arial"/>
+              </a:defRPr>
+            </a:pPr>
+            <a:r>
+              <a:rPr sz="1875" b="0">
+                <a:solidFill>
+                  <a:srgbClr val="251B35"/>
+                </a:solidFill>
+                <a:latin typeface="Arial"/>
+                <a:ea typeface="Arial"/>
+                <a:cs typeface="Arial"/>
+              </a:rPr>
+              <a:t>дахин идэвхжүүлэх үйлдлийг туршина.</a:t>
+            </a:r>
+          </a:p>
+        </p:txBody>
+      </p:sp>
+      <p:sp>
+        <p:nvSpPr>
+          <p:cNvPr id="8" name="">
+            <a:extLst xmlns:a="http://schemas.openxmlformats.org/drawingml/2006/main">
+              <a:ext uri="{FF2B5EF4-FFF2-40B4-BE49-F238E27FC236}">
+                <a16:creationId xmlns:a16="http://schemas.microsoft.com/office/drawing/2014/main" id="{52553AC6-E4D5-4A96-B4E1-B2AE1562A956}"/>
+              </a:ext>
+            </a:extLst>
+          </p:cNvPr>
+          <p:cNvSpPr>
+            <a:spLocks xmlns:a="http://schemas.openxmlformats.org/drawingml/2006/main" noGrp="1"/>
+          </p:cNvSpPr>
+          <p:nvPr/>
+        </p:nvSpPr>
+        <p:spPr>
+          <a:xfrm xmlns:a="http://schemas.openxmlformats.org/drawingml/2006/main">
+            <a:off x="1371600" y="4772025"/>
+            <a:ext cx="6953250" cy="419100"/>
+          </a:xfrm>
+          <a:prstGeom xmlns:a="http://schemas.openxmlformats.org/drawingml/2006/main" prst="rect">
+            <a:avLst/>
+          </a:prstGeom>
+          <a:noFill xmlns:a="http://schemas.openxmlformats.org/drawingml/2006/main"/>
+          <a:ln xmlns:a="http://schemas.openxmlformats.org/drawingml/2006/main" w="0">
+            <a:noFill/>
+          </a:ln>
+        </p:spPr>
+        <p:txBody>
+          <a:bodyPr xmlns:a="http://schemas.openxmlformats.org/drawingml/2006/main"/>
+          <a:lstStyle xmlns:a="http://schemas.openxmlformats.org/drawingml/2006/main">
+            <a:defPPr>
+              <a:defRPr sz="2175" b="1">
+                <a:solidFill>
+                  <a:srgbClr val="7409B7"/>
+                </a:solidFill>
+                <a:latin typeface="Arial"/>
+                <a:ea typeface="Arial"/>
+                <a:cs typeface="Arial"/>
+              </a:defRPr>
+            </a:defPPr>
+          </a:lstStyle>
+          <a:p xmlns:a="http://schemas.openxmlformats.org/drawingml/2006/main">
+            <a:pPr>
+              <a:defRPr sz="2175" b="1">
+                <a:solidFill>
+                  <a:srgbClr val="7409B7"/>
+                </a:solidFill>
+                <a:latin typeface="Arial"/>
+                <a:ea typeface="Arial"/>
+                <a:cs typeface="Arial"/>
+              </a:defRPr>
+            </a:pPr>
+            <a:r>
+              <a:rPr sz="2175" b="1">
+                <a:solidFill>
+                  <a:srgbClr val="7409B7"/>
+                </a:solidFill>
+                <a:latin typeface="Arial"/>
+                <a:ea typeface="Arial"/>
+                <a:cs typeface="Arial"/>
+              </a:rPr>
+              <a:t>Төлбөртэй үйлдэл</a:t>
+            </a:r>
+          </a:p>
+        </p:txBody>
+      </p:sp>
+      <p:sp>
+        <p:nvSpPr>
+          <p:cNvPr id="9" name="">
+            <a:extLst xmlns:a="http://schemas.openxmlformats.org/drawingml/2006/main">
+              <a:ext uri="{FF2B5EF4-FFF2-40B4-BE49-F238E27FC236}">
+                <a16:creationId xmlns:a16="http://schemas.microsoft.com/office/drawing/2014/main" id="{683D8BE7-94A3-4E56-9B90-37064D3B1DAD}"/>
+              </a:ext>
+            </a:extLst>
+          </p:cNvPr>
+          <p:cNvSpPr>
+            <a:spLocks xmlns:a="http://schemas.openxmlformats.org/drawingml/2006/main" noGrp="1"/>
+          </p:cNvSpPr>
+          <p:nvPr/>
+        </p:nvSpPr>
+        <p:spPr>
+          <a:xfrm xmlns:a="http://schemas.openxmlformats.org/drawingml/2006/main">
+            <a:off x="1371600" y="5238750"/>
+            <a:ext cx="6953250" cy="1085850"/>
+          </a:xfrm>
+          <a:prstGeom xmlns:a="http://schemas.openxmlformats.org/drawingml/2006/main" prst="rect">
+            <a:avLst/>
+          </a:prstGeom>
+          <a:noFill xmlns:a="http://schemas.openxmlformats.org/drawingml/2006/main"/>
+          <a:ln xmlns:a="http://schemas.openxmlformats.org/drawingml/2006/main" w="0">
+            <a:noFill/>
+          </a:ln>
+        </p:spPr>
+        <p:txBody>
+          <a:bodyPr xmlns:a="http://schemas.openxmlformats.org/drawingml/2006/main"/>
+          <a:lstStyle xmlns:a="http://schemas.openxmlformats.org/drawingml/2006/main">
+            <a:defPPr>
+              <a:defRPr sz="1875" b="0">
+                <a:solidFill>
+                  <a:srgbClr val="251B35"/>
+                </a:solidFill>
+                <a:latin typeface="Arial"/>
+                <a:ea typeface="Arial"/>
+                <a:cs typeface="Arial"/>
+              </a:defRPr>
+            </a:defPPr>
+          </a:lstStyle>
+          <a:p xmlns:a="http://schemas.openxmlformats.org/drawingml/2006/main">
+            <a:pPr>
+              <a:defRPr sz="1875" b="0">
+                <a:solidFill>
+                  <a:srgbClr val="251B35"/>
+                </a:solidFill>
+                <a:latin typeface="Arial"/>
+                <a:ea typeface="Arial"/>
+                <a:cs typeface="Arial"/>
+              </a:defRPr>
+            </a:pPr>
+            <a:r>
+              <a:rPr sz="1875" b="0">
+                <a:solidFill>
+                  <a:srgbClr val="251B35"/>
+                </a:solidFill>
+                <a:latin typeface="Arial"/>
+                <a:ea typeface="Arial"/>
+                <a:cs typeface="Arial"/>
+              </a:rPr>
+              <a:t>Зарын эрх, Pump, Sponsored нь төлбөртэй.</a:t>
+            </a:r>
+          </a:p>
+          <a:p xmlns:a="http://schemas.openxmlformats.org/drawingml/2006/main">
+            <a:pPr>
+              <a:defRPr sz="1875" b="0">
+                <a:solidFill>
+                  <a:srgbClr val="251B35"/>
+                </a:solidFill>
+                <a:latin typeface="Arial"/>
+                <a:ea typeface="Arial"/>
+                <a:cs typeface="Arial"/>
+              </a:defRPr>
+            </a:pPr>
+            <a:r>
+              <a:rPr sz="1875" b="0">
+                <a:solidFill>
+                  <a:srgbClr val="251B35"/>
+                </a:solidFill>
+                <a:latin typeface="Arial"/>
+                <a:ea typeface="Arial"/>
+                <a:cs typeface="Arial"/>
+              </a:rPr>
+              <a:t>Туршилтад оролцохын тулд бодит төлбөр</a:t>
+            </a:r>
+          </a:p>
+          <a:p xmlns:a="http://schemas.openxmlformats.org/drawingml/2006/main">
+            <a:pPr>
+              <a:defRPr sz="1875" b="0">
+                <a:solidFill>
+                  <a:srgbClr val="251B35"/>
+                </a:solidFill>
+                <a:latin typeface="Arial"/>
+                <a:ea typeface="Arial"/>
+                <a:cs typeface="Arial"/>
+              </a:defRPr>
+            </a:pPr>
+            <a:r>
+              <a:rPr sz="1875" b="0">
+                <a:solidFill>
+                  <a:srgbClr val="251B35"/>
+                </a:solidFill>
+                <a:latin typeface="Arial"/>
+                <a:ea typeface="Arial"/>
+                <a:cs typeface="Arial"/>
+              </a:rPr>
+              <a:t>хийх шаардлагагүй.</a:t>
+            </a:r>
+          </a:p>
+        </p:txBody>
+      </p:sp>
+      <p:pic>
+        <p:nvPicPr>
+          <p:cNvPr id="10" name="">
+            <a:extLst xmlns:a="http://schemas.openxmlformats.org/drawingml/2006/main">
+              <a:ext uri="{FF2B5EF4-FFF2-40B4-BE49-F238E27FC236}">
+                <a16:creationId xmlns:a16="http://schemas.microsoft.com/office/drawing/2014/main" id="{74FE509B-15C6-47CC-9A5D-4F5498C5D06B}"/>
+              </a:ext>
+            </a:extLst>
+          </p:cNvPr>
+          <p:cNvPicPr>
+            <a:picLocks xmlns:a="http://schemas.openxmlformats.org/drawingml/2006/main" noChangeAspect="1"/>
+          </p:cNvPicPr>
+          <p:nvPr/>
+        </p:nvPicPr>
+        <p:blipFill>
+          <a:blip xmlns:r="http://schemas.openxmlformats.org/officeDocument/2006/relationships" xmlns:a="http://schemas.openxmlformats.org/drawingml/2006/main" r:embed="Ree503bf6e25f4a8d"/>
+          <a:stretch xmlns:a="http://schemas.openxmlformats.org/drawingml/2006/main"/>
+        </p:blipFill>
+        <p:spPr>
+          <a:xfrm xmlns:a="http://schemas.openxmlformats.org/drawingml/2006/main">
+            <a:off x="8869092" y="1581150"/>
+            <a:ext cx="2245267" cy="4857750"/>
+          </a:xfrm>
+          <a:prstGeom xmlns:a="http://schemas.openxmlformats.org/drawingml/2006/main" prst="rect">
+            <a:avLst/>
+          </a:prstGeom>
+        </p:spPr>
+      </p:pic>
+    </p:spTree>
+    <p:extLst>
+      <p:ext uri="{BB962C8B-B14F-4D97-AF65-F5344CB8AC3E}">
+        <p14:creationId xmlns:p14="http://schemas.microsoft.com/office/powerpoint/2010/main" val="307830670"/>
+      </p:ext>
+    </p:extLst>
+  </p:cSld>
+</p:sld>
+</file>
+
+<file path=ppt/slides/slide7.xml><?xml version="1.0" encoding="utf-8"?>
+<p:sld xmlns:p="http://schemas.openxmlformats.org/presentationml/2006/main">
+  <p:cSld>
+    <p:bg>
+      <p:bgPr>
+        <a:solidFill xmlns:a="http://schemas.openxmlformats.org/drawingml/2006/main">
+          <a:srgbClr val="FFF4F0"/>
+        </a:solidFill>
+      </p:bgPr>
+    </p:bg>
+    <p:spTree>
+      <p:nvGrpSpPr>
+        <p:cNvPr id="1" name=""/>
+        <p:cNvGrpSpPr/>
+        <p:nvPr/>
+      </p:nvGrpSpPr>
+      <p:grpSpPr>
+        <a:xfrm xmlns:a="http://schemas.openxmlformats.org/drawingml/2006/main"/>
+      </p:grpSpPr>
+      <p:sp>
+        <p:nvSpPr>
+          <p:cNvPr id="13" name="">
+            <a:extLst xmlns:a="http://schemas.openxmlformats.org/drawingml/2006/main">
+              <a:ext uri="{FF2B5EF4-FFF2-40B4-BE49-F238E27FC236}">
+                <a16:creationId xmlns:a16="http://schemas.microsoft.com/office/drawing/2014/main" id="{928ED525-1059-4740-8D39-ED61E1013B32}"/>
+              </a:ext>
+            </a:extLst>
+          </p:cNvPr>
+          <p:cNvSpPr>
+            <a:spLocks xmlns:a="http://schemas.openxmlformats.org/drawingml/2006/main" noGrp="1"/>
+          </p:cNvSpPr>
+          <p:nvPr/>
+        </p:nvSpPr>
+        <p:spPr>
+          <a:xfrm xmlns:a="http://schemas.openxmlformats.org/drawingml/2006/main">
+            <a:off x="647700" y="552450"/>
+            <a:ext cx="10477500" cy="914400"/>
+          </a:xfrm>
+          <a:prstGeom xmlns:a="http://schemas.openxmlformats.org/drawingml/2006/main" prst="rect">
+            <a:avLst/>
+          </a:prstGeom>
+          <a:noFill xmlns:a="http://schemas.openxmlformats.org/drawingml/2006/main"/>
+          <a:ln xmlns:a="http://schemas.openxmlformats.org/drawingml/2006/main" w="0">
+            <a:noFill/>
+          </a:ln>
+        </p:spPr>
+        <p:txBody>
+          <a:bodyPr xmlns:a="http://schemas.openxmlformats.org/drawingml/2006/main"/>
+          <a:lstStyle xmlns:a="http://schemas.openxmlformats.org/drawingml/2006/main">
+            <a:defPPr>
+              <a:defRPr sz="3300" b="1">
+                <a:solidFill>
+                  <a:srgbClr val="7409B7"/>
+                </a:solidFill>
+                <a:latin typeface="Arial"/>
+                <a:ea typeface="Arial"/>
+                <a:cs typeface="Arial"/>
+              </a:defRPr>
+            </a:defPPr>
+          </a:lstStyle>
+          <a:p xmlns:a="http://schemas.openxmlformats.org/drawingml/2006/main">
+            <a:pPr>
+              <a:defRPr sz="3300" b="1">
+                <a:solidFill>
+                  <a:srgbClr val="7409B7"/>
+                </a:solidFill>
+                <a:latin typeface="Arial"/>
+                <a:ea typeface="Arial"/>
+                <a:cs typeface="Arial"/>
+              </a:defRPr>
+            </a:pPr>
+            <a:r>
+              <a:rPr sz="3300" b="1">
+                <a:solidFill>
+                  <a:srgbClr val="7409B7"/>
+                </a:solidFill>
+                <a:latin typeface="Arial"/>
+                <a:ea typeface="Arial"/>
+                <a:cs typeface="Arial"/>
+              </a:rPr>
+              <a:t>Хосоороо түрээс турших</a:t>
+            </a:r>
+          </a:p>
+        </p:txBody>
+      </p:sp>
+      <p:sp>
+        <p:nvSpPr>
+          <p:cNvPr id="2" name="">
+            <a:extLst xmlns:a="http://schemas.openxmlformats.org/drawingml/2006/main">
+              <a:ext uri="{FF2B5EF4-FFF2-40B4-BE49-F238E27FC236}">
+                <a16:creationId xmlns:a16="http://schemas.microsoft.com/office/drawing/2014/main" id="{001A4BB5-0B53-4120-9FAE-39F0E27A3A95}"/>
+              </a:ext>
+            </a:extLst>
+          </p:cNvPr>
+          <p:cNvSpPr>
+            <a:spLocks xmlns:a="http://schemas.openxmlformats.org/drawingml/2006/main" noGrp="1"/>
+          </p:cNvSpPr>
+          <p:nvPr/>
+        </p:nvSpPr>
+        <p:spPr>
+          <a:xfrm xmlns:a="http://schemas.openxmlformats.org/drawingml/2006/main">
+            <a:off x="647700" y="1466850"/>
+            <a:ext cx="10820400" cy="457200"/>
+          </a:xfrm>
+          <a:prstGeom xmlns:a="http://schemas.openxmlformats.org/drawingml/2006/main" prst="rect">
+            <a:avLst/>
+          </a:prstGeom>
+          <a:noFill xmlns:a="http://schemas.openxmlformats.org/drawingml/2006/main"/>
+          <a:ln xmlns:a="http://schemas.openxmlformats.org/drawingml/2006/main" w="0">
+            <a:noFill/>
+          </a:ln>
+        </p:spPr>
+        <p:txBody>
+          <a:bodyPr xmlns:a="http://schemas.openxmlformats.org/drawingml/2006/main"/>
+          <a:lstStyle xmlns:a="http://schemas.openxmlformats.org/drawingml/2006/main">
+            <a:defPPr>
+              <a:defRPr sz="2025" b="0">
+                <a:solidFill>
+                  <a:srgbClr val="251B35"/>
+                </a:solidFill>
+                <a:latin typeface="Arial"/>
+                <a:ea typeface="Arial"/>
+                <a:cs typeface="Arial"/>
+              </a:defRPr>
+            </a:defPPr>
+          </a:lstStyle>
+          <a:p xmlns:a="http://schemas.openxmlformats.org/drawingml/2006/main">
+            <a:pPr>
+              <a:defRPr sz="2025" b="0">
+                <a:solidFill>
+                  <a:srgbClr val="251B35"/>
+                </a:solidFill>
+                <a:latin typeface="Arial"/>
+                <a:ea typeface="Arial"/>
+                <a:cs typeface="Arial"/>
+              </a:defRPr>
+            </a:pPr>
+            <a:r>
+              <a:rPr sz="2025" b="0">
+                <a:solidFill>
+                  <a:srgbClr val="251B35"/>
+                </a:solidFill>
+                <a:latin typeface="Arial"/>
+                <a:ea typeface="Arial"/>
+                <a:cs typeface="Arial"/>
+              </a:rPr>
+              <a:t>Нэг нь түрээслүүлэгч, нөгөө нь түрээслэгч болж эхэлнэ.</a:t>
+            </a:r>
+          </a:p>
+        </p:txBody>
+      </p:sp>
+      <p:sp>
+        <p:nvSpPr>
+          <p:cNvPr id="3" name="">
+            <a:extLst xmlns:a="http://schemas.openxmlformats.org/drawingml/2006/main">
+              <a:ext uri="{FF2B5EF4-FFF2-40B4-BE49-F238E27FC236}">
+                <a16:creationId xmlns:a16="http://schemas.microsoft.com/office/drawing/2014/main" id="{C3A00100-975C-4F5C-AE6E-7C86DDFB65BD}"/>
+              </a:ext>
+            </a:extLst>
+          </p:cNvPr>
+          <p:cNvSpPr>
+            <a:spLocks xmlns:a="http://schemas.openxmlformats.org/drawingml/2006/main" noGrp="1"/>
+          </p:cNvSpPr>
+          <p:nvPr/>
+        </p:nvSpPr>
+        <p:spPr>
+          <a:xfrm xmlns:a="http://schemas.openxmlformats.org/drawingml/2006/main">
+            <a:off x="647700" y="2162175"/>
+            <a:ext cx="552450" cy="495300"/>
+          </a:xfrm>
+          <a:prstGeom xmlns:a="http://schemas.openxmlformats.org/drawingml/2006/main" prst="rect">
+            <a:avLst/>
+          </a:prstGeom>
+          <a:noFill xmlns:a="http://schemas.openxmlformats.org/drawingml/2006/main"/>
+          <a:ln xmlns:a="http://schemas.openxmlformats.org/drawingml/2006/main" w="0">
+            <a:noFill/>
+          </a:ln>
+        </p:spPr>
+        <p:txBody>
+          <a:bodyPr xmlns:a="http://schemas.openxmlformats.org/drawingml/2006/main"/>
+          <a:lstStyle xmlns:a="http://schemas.openxmlformats.org/drawingml/2006/main">
+            <a:defPPr>
+              <a:defRPr sz="2550" b="1">
+                <a:solidFill>
+                  <a:srgbClr val="7409B7"/>
+                </a:solidFill>
+                <a:latin typeface="Arial"/>
+                <a:ea typeface="Arial"/>
+                <a:cs typeface="Arial"/>
+              </a:defRPr>
+            </a:defPPr>
+          </a:lstStyle>
+          <a:p xmlns:a="http://schemas.openxmlformats.org/drawingml/2006/main">
+            <a:pPr>
+              <a:defRPr sz="2550" b="1">
+                <a:solidFill>
+                  <a:srgbClr val="7409B7"/>
+                </a:solidFill>
+                <a:latin typeface="Arial"/>
+                <a:ea typeface="Arial"/>
+                <a:cs typeface="Arial"/>
+              </a:defRPr>
+            </a:pPr>
+            <a:r>
+              <a:rPr sz="2550" b="1">
+                <a:solidFill>
+                  <a:srgbClr val="7409B7"/>
+                </a:solidFill>
+                <a:latin typeface="Arial"/>
+                <a:ea typeface="Arial"/>
+                <a:cs typeface="Arial"/>
+              </a:rPr>
+              <a:t>01</a:t>
+            </a:r>
+          </a:p>
+        </p:txBody>
+      </p:sp>
+      <p:sp>
+        <p:nvSpPr>
+          <p:cNvPr id="4" name="">
+            <a:extLst xmlns:a="http://schemas.openxmlformats.org/drawingml/2006/main">
+              <a:ext uri="{FF2B5EF4-FFF2-40B4-BE49-F238E27FC236}">
+                <a16:creationId xmlns:a16="http://schemas.microsoft.com/office/drawing/2014/main" id="{2E26D68C-6529-4F89-B34A-67CB5FF70E7B}"/>
+              </a:ext>
+            </a:extLst>
+          </p:cNvPr>
+          <p:cNvSpPr>
+            <a:spLocks xmlns:a="http://schemas.openxmlformats.org/drawingml/2006/main" noGrp="1"/>
+          </p:cNvSpPr>
+          <p:nvPr/>
+        </p:nvSpPr>
+        <p:spPr>
+          <a:xfrm xmlns:a="http://schemas.openxmlformats.org/drawingml/2006/main">
+            <a:off x="1371600" y="2162175"/>
+            <a:ext cx="9144000" cy="438150"/>
+          </a:xfrm>
+          <a:prstGeom xmlns:a="http://schemas.openxmlformats.org/drawingml/2006/main" prst="rect">
+            <a:avLst/>
+          </a:prstGeom>
+          <a:noFill xmlns:a="http://schemas.openxmlformats.org/drawingml/2006/main"/>
+          <a:ln xmlns:a="http://schemas.openxmlformats.org/drawingml/2006/main" w="0">
+            <a:noFill/>
+          </a:ln>
+        </p:spPr>
+        <p:txBody>
+          <a:bodyPr xmlns:a="http://schemas.openxmlformats.org/drawingml/2006/main"/>
+          <a:lstStyle xmlns:a="http://schemas.openxmlformats.org/drawingml/2006/main">
+            <a:defPPr>
+              <a:defRPr sz="2175" b="1">
+                <a:solidFill>
+                  <a:srgbClr val="251B35"/>
+                </a:solidFill>
+                <a:latin typeface="Arial"/>
+                <a:ea typeface="Arial"/>
+                <a:cs typeface="Arial"/>
+              </a:defRPr>
+            </a:defPPr>
+          </a:lstStyle>
+          <a:p xmlns:a="http://schemas.openxmlformats.org/drawingml/2006/main">
+            <a:pPr>
+              <a:defRPr sz="2175" b="1">
+                <a:solidFill>
+                  <a:srgbClr val="251B35"/>
+                </a:solidFill>
+                <a:latin typeface="Arial"/>
+                <a:ea typeface="Arial"/>
+                <a:cs typeface="Arial"/>
+              </a:defRPr>
+            </a:pPr>
+            <a:r>
+              <a:rPr sz="2175" b="1">
+                <a:solidFill>
+                  <a:srgbClr val="251B35"/>
+                </a:solidFill>
+                <a:latin typeface="Arial"/>
+                <a:ea typeface="Arial"/>
+                <a:cs typeface="Arial"/>
+              </a:rPr>
+              <a:t>Хүсэлт ба нөхцөл</a:t>
+            </a:r>
+          </a:p>
+        </p:txBody>
+      </p:sp>
+      <p:sp>
+        <p:nvSpPr>
+          <p:cNvPr id="5" name="">
+            <a:extLst xmlns:a="http://schemas.openxmlformats.org/drawingml/2006/main">
+              <a:ext uri="{FF2B5EF4-FFF2-40B4-BE49-F238E27FC236}">
+                <a16:creationId xmlns:a16="http://schemas.microsoft.com/office/drawing/2014/main" id="{7A7B6FF9-8981-4638-9273-51B2856F11E1}"/>
+              </a:ext>
+            </a:extLst>
+          </p:cNvPr>
+          <p:cNvSpPr>
+            <a:spLocks xmlns:a="http://schemas.openxmlformats.org/drawingml/2006/main" noGrp="1"/>
+          </p:cNvSpPr>
+          <p:nvPr/>
+        </p:nvSpPr>
+        <p:spPr>
+          <a:xfrm xmlns:a="http://schemas.openxmlformats.org/drawingml/2006/main">
+            <a:off x="1371600" y="2657475"/>
+            <a:ext cx="9144000" cy="819150"/>
+          </a:xfrm>
+          <a:prstGeom xmlns:a="http://schemas.openxmlformats.org/drawingml/2006/main" prst="rect">
+            <a:avLst/>
+          </a:prstGeom>
+          <a:noFill xmlns:a="http://schemas.openxmlformats.org/drawingml/2006/main"/>
+          <a:ln xmlns:a="http://schemas.openxmlformats.org/drawingml/2006/main" w="0">
+            <a:noFill/>
+          </a:ln>
+        </p:spPr>
+        <p:txBody>
+          <a:bodyPr xmlns:a="http://schemas.openxmlformats.org/drawingml/2006/main"/>
+          <a:lstStyle xmlns:a="http://schemas.openxmlformats.org/drawingml/2006/main">
+            <a:defPPr>
+              <a:defRPr sz="1875" b="0">
+                <a:solidFill>
+                  <a:srgbClr val="251B35"/>
+                </a:solidFill>
+                <a:latin typeface="Arial"/>
+                <a:ea typeface="Arial"/>
+                <a:cs typeface="Arial"/>
+              </a:defRPr>
+            </a:defPPr>
+          </a:lstStyle>
+          <a:p xmlns:a="http://schemas.openxmlformats.org/drawingml/2006/main">
+            <a:pPr>
+              <a:defRPr sz="1875" b="0">
+                <a:solidFill>
+                  <a:srgbClr val="251B35"/>
+                </a:solidFill>
+                <a:latin typeface="Arial"/>
+                <a:ea typeface="Arial"/>
+                <a:cs typeface="Arial"/>
+              </a:defRPr>
+            </a:pPr>
+            <a:r>
+              <a:rPr sz="1875" b="0">
+                <a:solidFill>
+                  <a:srgbClr val="251B35"/>
+                </a:solidFill>
+                <a:latin typeface="Arial"/>
+                <a:ea typeface="Arial"/>
+                <a:cs typeface="Arial"/>
+              </a:rPr>
+              <a:t>Түрээслэгч нөгөөгийнхөө зар руу хүсэлт илгээнэ.</a:t>
+            </a:r>
+          </a:p>
+          <a:p xmlns:a="http://schemas.openxmlformats.org/drawingml/2006/main">
+            <a:pPr>
+              <a:defRPr sz="1875" b="0">
+                <a:solidFill>
+                  <a:srgbClr val="251B35"/>
+                </a:solidFill>
+                <a:latin typeface="Arial"/>
+                <a:ea typeface="Arial"/>
+                <a:cs typeface="Arial"/>
+              </a:defRPr>
+            </a:pPr>
+            <a:r>
+              <a:rPr sz="1875" b="0">
+                <a:solidFill>
+                  <a:srgbClr val="251B35"/>
+                </a:solidFill>
+                <a:latin typeface="Arial"/>
+                <a:ea typeface="Arial"/>
+                <a:cs typeface="Arial"/>
+              </a:rPr>
+              <a:t>Эзэн зөвшөөрч, хоёр тал гэрээний нөхцөлийг баталгаажуулна.</a:t>
+            </a:r>
+          </a:p>
+        </p:txBody>
+      </p:sp>
+      <p:sp>
+        <p:nvSpPr>
+          <p:cNvPr id="6" name="">
+            <a:extLst xmlns:a="http://schemas.openxmlformats.org/drawingml/2006/main">
+              <a:ext uri="{FF2B5EF4-FFF2-40B4-BE49-F238E27FC236}">
+                <a16:creationId xmlns:a16="http://schemas.microsoft.com/office/drawing/2014/main" id="{3D6F1614-7D11-4847-B641-C23A1880B2BF}"/>
+              </a:ext>
+            </a:extLst>
+          </p:cNvPr>
+          <p:cNvSpPr>
+            <a:spLocks xmlns:a="http://schemas.openxmlformats.org/drawingml/2006/main" noGrp="1"/>
+          </p:cNvSpPr>
+          <p:nvPr/>
+        </p:nvSpPr>
+        <p:spPr>
+          <a:xfrm xmlns:a="http://schemas.openxmlformats.org/drawingml/2006/main">
+            <a:off x="647700" y="3476625"/>
+            <a:ext cx="552450" cy="495300"/>
+          </a:xfrm>
+          <a:prstGeom xmlns:a="http://schemas.openxmlformats.org/drawingml/2006/main" prst="rect">
+            <a:avLst/>
+          </a:prstGeom>
+          <a:noFill xmlns:a="http://schemas.openxmlformats.org/drawingml/2006/main"/>
+          <a:ln xmlns:a="http://schemas.openxmlformats.org/drawingml/2006/main" w="0">
+            <a:noFill/>
+          </a:ln>
+        </p:spPr>
+        <p:txBody>
+          <a:bodyPr xmlns:a="http://schemas.openxmlformats.org/drawingml/2006/main"/>
+          <a:lstStyle xmlns:a="http://schemas.openxmlformats.org/drawingml/2006/main">
+            <a:defPPr>
+              <a:defRPr sz="2550" b="1">
+                <a:solidFill>
+                  <a:srgbClr val="7409B7"/>
+                </a:solidFill>
+                <a:latin typeface="Arial"/>
+                <a:ea typeface="Arial"/>
+                <a:cs typeface="Arial"/>
+              </a:defRPr>
+            </a:defPPr>
+          </a:lstStyle>
+          <a:p xmlns:a="http://schemas.openxmlformats.org/drawingml/2006/main">
+            <a:pPr>
+              <a:defRPr sz="2550" b="1">
+                <a:solidFill>
+                  <a:srgbClr val="7409B7"/>
+                </a:solidFill>
+                <a:latin typeface="Arial"/>
+                <a:ea typeface="Arial"/>
+                <a:cs typeface="Arial"/>
+              </a:defRPr>
+            </a:pPr>
+            <a:r>
+              <a:rPr sz="2550" b="1">
+                <a:solidFill>
+                  <a:srgbClr val="7409B7"/>
+                </a:solidFill>
+                <a:latin typeface="Arial"/>
+                <a:ea typeface="Arial"/>
+                <a:cs typeface="Arial"/>
+              </a:rPr>
+              <a:t>02</a:t>
+            </a:r>
+          </a:p>
+        </p:txBody>
+      </p:sp>
+      <p:sp>
+        <p:nvSpPr>
+          <p:cNvPr id="7" name="">
+            <a:extLst xmlns:a="http://schemas.openxmlformats.org/drawingml/2006/main">
+              <a:ext uri="{FF2B5EF4-FFF2-40B4-BE49-F238E27FC236}">
+                <a16:creationId xmlns:a16="http://schemas.microsoft.com/office/drawing/2014/main" id="{6ED759DE-F416-422B-B19F-1F6BA1212F17}"/>
+              </a:ext>
+            </a:extLst>
+          </p:cNvPr>
+          <p:cNvSpPr>
+            <a:spLocks xmlns:a="http://schemas.openxmlformats.org/drawingml/2006/main" noGrp="1"/>
+          </p:cNvSpPr>
+          <p:nvPr/>
+        </p:nvSpPr>
+        <p:spPr>
+          <a:xfrm xmlns:a="http://schemas.openxmlformats.org/drawingml/2006/main">
+            <a:off x="1371600" y="3476625"/>
+            <a:ext cx="9144000" cy="438150"/>
+          </a:xfrm>
+          <a:prstGeom xmlns:a="http://schemas.openxmlformats.org/drawingml/2006/main" prst="rect">
+            <a:avLst/>
+          </a:prstGeom>
+          <a:noFill xmlns:a="http://schemas.openxmlformats.org/drawingml/2006/main"/>
+          <a:ln xmlns:a="http://schemas.openxmlformats.org/drawingml/2006/main" w="0">
+            <a:noFill/>
+          </a:ln>
+        </p:spPr>
+        <p:txBody>
+          <a:bodyPr xmlns:a="http://schemas.openxmlformats.org/drawingml/2006/main"/>
+          <a:lstStyle xmlns:a="http://schemas.openxmlformats.org/drawingml/2006/main">
+            <a:defPPr>
+              <a:defRPr sz="2175" b="1">
+                <a:solidFill>
+                  <a:srgbClr val="251B35"/>
+                </a:solidFill>
+                <a:latin typeface="Arial"/>
+                <a:ea typeface="Arial"/>
+                <a:cs typeface="Arial"/>
+              </a:defRPr>
+            </a:defPPr>
+          </a:lstStyle>
+          <a:p xmlns:a="http://schemas.openxmlformats.org/drawingml/2006/main">
+            <a:pPr>
+              <a:defRPr sz="2175" b="1">
+                <a:solidFill>
+                  <a:srgbClr val="251B35"/>
+                </a:solidFill>
+                <a:latin typeface="Arial"/>
+                <a:ea typeface="Arial"/>
+                <a:cs typeface="Arial"/>
+              </a:defRPr>
+            </a:pPr>
+            <a:r>
+              <a:rPr sz="2175" b="1">
+                <a:solidFill>
+                  <a:srgbClr val="251B35"/>
+                </a:solidFill>
+                <a:latin typeface="Arial"/>
+                <a:ea typeface="Arial"/>
+                <a:cs typeface="Arial"/>
+              </a:rPr>
+              <a:t>Түрээс эхлэх ба дуусах</a:t>
+            </a:r>
+          </a:p>
+        </p:txBody>
+      </p:sp>
+      <p:sp>
+        <p:nvSpPr>
+          <p:cNvPr id="8" name="">
+            <a:extLst xmlns:a="http://schemas.openxmlformats.org/drawingml/2006/main">
+              <a:ext uri="{FF2B5EF4-FFF2-40B4-BE49-F238E27FC236}">
+                <a16:creationId xmlns:a16="http://schemas.microsoft.com/office/drawing/2014/main" id="{FF2E5ABA-6657-46ED-950D-4F98863F3353}"/>
+              </a:ext>
+            </a:extLst>
+          </p:cNvPr>
+          <p:cNvSpPr>
+            <a:spLocks xmlns:a="http://schemas.openxmlformats.org/drawingml/2006/main" noGrp="1"/>
+          </p:cNvSpPr>
+          <p:nvPr/>
+        </p:nvSpPr>
+        <p:spPr>
+          <a:xfrm xmlns:a="http://schemas.openxmlformats.org/drawingml/2006/main">
+            <a:off x="1371600" y="3971925"/>
+            <a:ext cx="9144000" cy="819150"/>
+          </a:xfrm>
+          <a:prstGeom xmlns:a="http://schemas.openxmlformats.org/drawingml/2006/main" prst="rect">
+            <a:avLst/>
+          </a:prstGeom>
+          <a:noFill xmlns:a="http://schemas.openxmlformats.org/drawingml/2006/main"/>
+          <a:ln xmlns:a="http://schemas.openxmlformats.org/drawingml/2006/main" w="0">
+            <a:noFill/>
+          </a:ln>
+        </p:spPr>
+        <p:txBody>
+          <a:bodyPr xmlns:a="http://schemas.openxmlformats.org/drawingml/2006/main"/>
+          <a:lstStyle xmlns:a="http://schemas.openxmlformats.org/drawingml/2006/main">
+            <a:defPPr>
+              <a:defRPr sz="1875" b="0">
+                <a:solidFill>
+                  <a:srgbClr val="251B35"/>
+                </a:solidFill>
+                <a:latin typeface="Arial"/>
+                <a:ea typeface="Arial"/>
+                <a:cs typeface="Arial"/>
+              </a:defRPr>
+            </a:defPPr>
+          </a:lstStyle>
+          <a:p xmlns:a="http://schemas.openxmlformats.org/drawingml/2006/main">
+            <a:pPr>
+              <a:defRPr sz="1875" b="0">
+                <a:solidFill>
+                  <a:srgbClr val="251B35"/>
+                </a:solidFill>
+                <a:latin typeface="Arial"/>
+                <a:ea typeface="Arial"/>
+                <a:cs typeface="Arial"/>
+              </a:defRPr>
+            </a:pPr>
+            <a:r>
+              <a:rPr sz="1875" b="0">
+                <a:solidFill>
+                  <a:srgbClr val="251B35"/>
+                </a:solidFill>
+                <a:latin typeface="Arial"/>
+                <a:ea typeface="Arial"/>
+                <a:cs typeface="Arial"/>
+              </a:rPr>
+              <a:t>Бараа хүлээлцэх үйлдлийг хоёр талаас баталгаажуулна.</a:t>
+            </a:r>
+          </a:p>
+          <a:p xmlns:a="http://schemas.openxmlformats.org/drawingml/2006/main">
+            <a:pPr>
+              <a:defRPr sz="1875" b="0">
+                <a:solidFill>
+                  <a:srgbClr val="251B35"/>
+                </a:solidFill>
+                <a:latin typeface="Arial"/>
+                <a:ea typeface="Arial"/>
+                <a:cs typeface="Arial"/>
+              </a:defRPr>
+            </a:pPr>
+            <a:r>
+              <a:rPr sz="1875" b="0">
+                <a:solidFill>
+                  <a:srgbClr val="251B35"/>
+                </a:solidFill>
+                <a:latin typeface="Arial"/>
+                <a:ea typeface="Arial"/>
+                <a:cs typeface="Arial"/>
+              </a:rPr>
+              <a:t>Буцааж өгөх, эзэн хүлээн авах, дуусгах ба үнэлэхийг туршина.</a:t>
+            </a:r>
+          </a:p>
+        </p:txBody>
+      </p:sp>
+      <p:sp>
+        <p:nvSpPr>
+          <p:cNvPr id="9" name="">
+            <a:extLst xmlns:a="http://schemas.openxmlformats.org/drawingml/2006/main">
+              <a:ext uri="{FF2B5EF4-FFF2-40B4-BE49-F238E27FC236}">
+                <a16:creationId xmlns:a16="http://schemas.microsoft.com/office/drawing/2014/main" id="{BFCF17BE-DBC1-48EB-BA00-A2904E2166FA}"/>
+              </a:ext>
+            </a:extLst>
+          </p:cNvPr>
+          <p:cNvSpPr>
+            <a:spLocks xmlns:a="http://schemas.openxmlformats.org/drawingml/2006/main" noGrp="1"/>
+          </p:cNvSpPr>
+          <p:nvPr/>
+        </p:nvSpPr>
+        <p:spPr>
+          <a:xfrm xmlns:a="http://schemas.openxmlformats.org/drawingml/2006/main">
+            <a:off x="647700" y="4791075"/>
+            <a:ext cx="552450" cy="495300"/>
+          </a:xfrm>
+          <a:prstGeom xmlns:a="http://schemas.openxmlformats.org/drawingml/2006/main" prst="rect">
+            <a:avLst/>
+          </a:prstGeom>
+          <a:noFill xmlns:a="http://schemas.openxmlformats.org/drawingml/2006/main"/>
+          <a:ln xmlns:a="http://schemas.openxmlformats.org/drawingml/2006/main" w="0">
+            <a:noFill/>
+          </a:ln>
+        </p:spPr>
+        <p:txBody>
+          <a:bodyPr xmlns:a="http://schemas.openxmlformats.org/drawingml/2006/main"/>
+          <a:lstStyle xmlns:a="http://schemas.openxmlformats.org/drawingml/2006/main">
+            <a:defPPr>
+              <a:defRPr sz="2550" b="1">
+                <a:solidFill>
+                  <a:srgbClr val="7409B7"/>
+                </a:solidFill>
+                <a:latin typeface="Arial"/>
+                <a:ea typeface="Arial"/>
+                <a:cs typeface="Arial"/>
+              </a:defRPr>
+            </a:defPPr>
+          </a:lstStyle>
+          <a:p xmlns:a="http://schemas.openxmlformats.org/drawingml/2006/main">
+            <a:pPr>
+              <a:defRPr sz="2550" b="1">
+                <a:solidFill>
+                  <a:srgbClr val="7409B7"/>
+                </a:solidFill>
+                <a:latin typeface="Arial"/>
+                <a:ea typeface="Arial"/>
+                <a:cs typeface="Arial"/>
+              </a:defRPr>
+            </a:pPr>
+            <a:r>
+              <a:rPr sz="2550" b="1">
+                <a:solidFill>
+                  <a:srgbClr val="7409B7"/>
+                </a:solidFill>
+                <a:latin typeface="Arial"/>
+                <a:ea typeface="Arial"/>
+                <a:cs typeface="Arial"/>
+              </a:rPr>
+              <a:t>03</a:t>
+            </a:r>
+          </a:p>
+        </p:txBody>
+      </p:sp>
+      <p:sp>
+        <p:nvSpPr>
+          <p:cNvPr id="10" name="">
+            <a:extLst xmlns:a="http://schemas.openxmlformats.org/drawingml/2006/main">
+              <a:ext uri="{FF2B5EF4-FFF2-40B4-BE49-F238E27FC236}">
+                <a16:creationId xmlns:a16="http://schemas.microsoft.com/office/drawing/2014/main" id="{78CEC43C-AA68-4814-A052-173E3A9EB114}"/>
+              </a:ext>
+            </a:extLst>
+          </p:cNvPr>
+          <p:cNvSpPr>
+            <a:spLocks xmlns:a="http://schemas.openxmlformats.org/drawingml/2006/main" noGrp="1"/>
+          </p:cNvSpPr>
+          <p:nvPr/>
+        </p:nvSpPr>
+        <p:spPr>
+          <a:xfrm xmlns:a="http://schemas.openxmlformats.org/drawingml/2006/main">
+            <a:off x="1371600" y="4791075"/>
+            <a:ext cx="9144000" cy="438150"/>
+          </a:xfrm>
+          <a:prstGeom xmlns:a="http://schemas.openxmlformats.org/drawingml/2006/main" prst="rect">
+            <a:avLst/>
+          </a:prstGeom>
+          <a:noFill xmlns:a="http://schemas.openxmlformats.org/drawingml/2006/main"/>
+          <a:ln xmlns:a="http://schemas.openxmlformats.org/drawingml/2006/main" w="0">
+            <a:noFill/>
+          </a:ln>
+        </p:spPr>
+        <p:txBody>
+          <a:bodyPr xmlns:a="http://schemas.openxmlformats.org/drawingml/2006/main"/>
+          <a:lstStyle xmlns:a="http://schemas.openxmlformats.org/drawingml/2006/main">
+            <a:defPPr>
+              <a:defRPr sz="2175" b="1">
+                <a:solidFill>
+                  <a:srgbClr val="251B35"/>
+                </a:solidFill>
+                <a:latin typeface="Arial"/>
+                <a:ea typeface="Arial"/>
+                <a:cs typeface="Arial"/>
+              </a:defRPr>
+            </a:defPPr>
+          </a:lstStyle>
+          <a:p xmlns:a="http://schemas.openxmlformats.org/drawingml/2006/main">
+            <a:pPr>
+              <a:defRPr sz="2175" b="1">
+                <a:solidFill>
+                  <a:srgbClr val="251B35"/>
+                </a:solidFill>
+                <a:latin typeface="Arial"/>
+                <a:ea typeface="Arial"/>
+                <a:cs typeface="Arial"/>
+              </a:defRPr>
+            </a:pPr>
+            <a:r>
+              <a:rPr sz="2175" b="1">
+                <a:solidFill>
+                  <a:srgbClr val="251B35"/>
+                </a:solidFill>
+                <a:latin typeface="Arial"/>
+                <a:ea typeface="Arial"/>
+                <a:cs typeface="Arial"/>
+              </a:rPr>
+              <a:t>Хоёр талын мэдэгдэл</a:t>
+            </a:r>
+          </a:p>
+        </p:txBody>
+      </p:sp>
+      <p:sp>
+        <p:nvSpPr>
+          <p:cNvPr id="11" name="">
+            <a:extLst xmlns:a="http://schemas.openxmlformats.org/drawingml/2006/main">
+              <a:ext uri="{FF2B5EF4-FFF2-40B4-BE49-F238E27FC236}">
+                <a16:creationId xmlns:a16="http://schemas.microsoft.com/office/drawing/2014/main" id="{5A7DE0A3-6927-4274-8716-294EE22F2ED7}"/>
+              </a:ext>
+            </a:extLst>
+          </p:cNvPr>
+          <p:cNvSpPr>
+            <a:spLocks xmlns:a="http://schemas.openxmlformats.org/drawingml/2006/main" noGrp="1"/>
+          </p:cNvSpPr>
+          <p:nvPr/>
+        </p:nvSpPr>
+        <p:spPr>
+          <a:xfrm xmlns:a="http://schemas.openxmlformats.org/drawingml/2006/main">
+            <a:off x="1371600" y="5286375"/>
+            <a:ext cx="9144000" cy="819150"/>
+          </a:xfrm>
+          <a:prstGeom xmlns:a="http://schemas.openxmlformats.org/drawingml/2006/main" prst="rect">
+            <a:avLst/>
+          </a:prstGeom>
+          <a:noFill xmlns:a="http://schemas.openxmlformats.org/drawingml/2006/main"/>
+          <a:ln xmlns:a="http://schemas.openxmlformats.org/drawingml/2006/main" w="0">
+            <a:noFill/>
+          </a:ln>
+        </p:spPr>
+        <p:txBody>
+          <a:bodyPr xmlns:a="http://schemas.openxmlformats.org/drawingml/2006/main"/>
+          <a:lstStyle xmlns:a="http://schemas.openxmlformats.org/drawingml/2006/main">
+            <a:defPPr>
+              <a:defRPr sz="1875" b="0">
+                <a:solidFill>
+                  <a:srgbClr val="251B35"/>
+                </a:solidFill>
+                <a:latin typeface="Arial"/>
+                <a:ea typeface="Arial"/>
+                <a:cs typeface="Arial"/>
+              </a:defRPr>
+            </a:defPPr>
+          </a:lstStyle>
+          <a:p xmlns:a="http://schemas.openxmlformats.org/drawingml/2006/main">
+            <a:pPr>
+              <a:defRPr sz="1875" b="0">
+                <a:solidFill>
+                  <a:srgbClr val="251B35"/>
+                </a:solidFill>
+                <a:latin typeface="Arial"/>
+                <a:ea typeface="Arial"/>
+                <a:cs typeface="Arial"/>
+              </a:defRPr>
+            </a:pPr>
+            <a:r>
+              <a:rPr sz="1875" b="0">
+                <a:solidFill>
+                  <a:srgbClr val="251B35"/>
+                </a:solidFill>
+                <a:latin typeface="Arial"/>
+                <a:ea typeface="Arial"/>
+                <a:cs typeface="Arial"/>
+              </a:rPr>
+              <a:t>Алхам бүрд аппын Мэдэгдэл хэсэг, түрээсийн төлөвийг шалгана.</a:t>
+            </a:r>
+          </a:p>
+          <a:p xmlns:a="http://schemas.openxmlformats.org/drawingml/2006/main">
+            <a:pPr>
+              <a:defRPr sz="1875" b="0">
+                <a:solidFill>
+                  <a:srgbClr val="251B35"/>
+                </a:solidFill>
+                <a:latin typeface="Arial"/>
+                <a:ea typeface="Arial"/>
+                <a:cs typeface="Arial"/>
+              </a:defRPr>
+            </a:pPr>
+            <a:r>
+              <a:rPr sz="1875" b="0">
+                <a:solidFill>
+                  <a:srgbClr val="251B35"/>
+                </a:solidFill>
+                <a:latin typeface="Arial"/>
+                <a:ea typeface="Arial"/>
+                <a:cs typeface="Arial"/>
+              </a:rPr>
+              <a:t>Аппыг ард ажиллуулж push ирсэн эсэх, дарж нээгдэхийг туршина.</a:t>
+            </a:r>
+          </a:p>
+        </p:txBody>
+      </p:sp>
+      <p:sp>
+        <p:nvSpPr>
+          <p:cNvPr id="12" name="">
+            <a:extLst xmlns:a="http://schemas.openxmlformats.org/drawingml/2006/main">
+              <a:ext uri="{FF2B5EF4-FFF2-40B4-BE49-F238E27FC236}">
+                <a16:creationId xmlns:a16="http://schemas.microsoft.com/office/drawing/2014/main" id="{7EDC4506-A8E6-4085-962A-61725A587158}"/>
+              </a:ext>
+            </a:extLst>
+          </p:cNvPr>
+          <p:cNvSpPr>
+            <a:spLocks xmlns:a="http://schemas.openxmlformats.org/drawingml/2006/main" noGrp="1"/>
+          </p:cNvSpPr>
+          <p:nvPr/>
+        </p:nvSpPr>
+        <p:spPr>
+          <a:xfrm xmlns:a="http://schemas.openxmlformats.org/drawingml/2006/main">
+            <a:off x="647700" y="6219825"/>
+            <a:ext cx="10820400" cy="428625"/>
+          </a:xfrm>
+          <a:prstGeom xmlns:a="http://schemas.openxmlformats.org/drawingml/2006/main" prst="rect">
+            <a:avLst/>
+          </a:prstGeom>
+          <a:noFill xmlns:a="http://schemas.openxmlformats.org/drawingml/2006/main"/>
+          <a:ln xmlns:a="http://schemas.openxmlformats.org/drawingml/2006/main" w="0">
+            <a:noFill/>
+          </a:ln>
+        </p:spPr>
+        <p:txBody>
+          <a:bodyPr xmlns:a="http://schemas.openxmlformats.org/drawingml/2006/main"/>
+          <a:lstStyle xmlns:a="http://schemas.openxmlformats.org/drawingml/2006/main">
+            <a:defPPr>
+              <a:defRPr sz="1650" b="1">
+                <a:solidFill>
+                  <a:srgbClr val="7409B7"/>
+                </a:solidFill>
+                <a:latin typeface="Arial"/>
+                <a:ea typeface="Arial"/>
+                <a:cs typeface="Arial"/>
+              </a:defRPr>
+            </a:defPPr>
+          </a:lstStyle>
+          <a:p xmlns:a="http://schemas.openxmlformats.org/drawingml/2006/main">
+            <a:pPr>
+              <a:defRPr sz="1650" b="1">
+                <a:solidFill>
+                  <a:srgbClr val="7409B7"/>
+                </a:solidFill>
+                <a:latin typeface="Arial"/>
+                <a:ea typeface="Arial"/>
+                <a:cs typeface="Arial"/>
+              </a:defRPr>
+            </a:pPr>
+            <a:r>
+              <a:rPr sz="1650" b="1">
+                <a:solidFill>
+                  <a:srgbClr val="7409B7"/>
+                </a:solidFill>
+                <a:latin typeface="Arial"/>
+                <a:ea typeface="Arial"/>
+                <a:cs typeface="Arial"/>
+              </a:rPr>
+              <a:t>Дараа нь дүрээ солино. Мэдэгдэл ирээгүй бол аль алхам, хэнд ирээгүйг бичнэ.</a:t>
+            </a:r>
+          </a:p>
+        </p:txBody>
+      </p:sp>
+    </p:spTree>
+    <p:extLst>
+      <p:ext uri="{BB962C8B-B14F-4D97-AF65-F5344CB8AC3E}">
+        <p14:creationId xmlns:p14="http://schemas.microsoft.com/office/powerpoint/2010/main" val="1906360952"/>
+      </p:ext>
+    </p:extLst>
+  </p:cSld>
+</p:sld>
+</file>
+
+<file path=ppt/slides/slide8.xml><?xml version="1.0" encoding="utf-8"?>
+<p:sld xmlns:p="http://schemas.openxmlformats.org/presentationml/2006/main">
+  <p:cSld>
+    <p:bg>
+      <p:bgPr>
+        <a:solidFill xmlns:a="http://schemas.openxmlformats.org/drawingml/2006/main">
+          <a:srgbClr val="FFF4F0"/>
+        </a:solidFill>
+      </p:bgPr>
+    </p:bg>
+    <p:spTree>
+      <p:nvGrpSpPr>
+        <p:cNvPr id="1" name=""/>
+        <p:cNvGrpSpPr/>
+        <p:nvPr/>
+      </p:nvGrpSpPr>
+      <p:grpSpPr>
+        <a:xfrm xmlns:a="http://schemas.openxmlformats.org/drawingml/2006/main"/>
+      </p:grpSpPr>
+      <p:sp>
+        <p:nvSpPr>
+          <p:cNvPr id="10" name="">
+            <a:extLst xmlns:a="http://schemas.openxmlformats.org/drawingml/2006/main">
+              <a:ext uri="{FF2B5EF4-FFF2-40B4-BE49-F238E27FC236}">
+                <a16:creationId xmlns:a16="http://schemas.microsoft.com/office/drawing/2014/main" id="{48DD1858-03AE-4852-83BB-FEA34456B23E}"/>
+              </a:ext>
+            </a:extLst>
+          </p:cNvPr>
+          <p:cNvSpPr>
+            <a:spLocks xmlns:a="http://schemas.openxmlformats.org/drawingml/2006/main" noGrp="1"/>
+          </p:cNvSpPr>
+          <p:nvPr/>
+        </p:nvSpPr>
+        <p:spPr>
+          <a:xfrm xmlns:a="http://schemas.openxmlformats.org/drawingml/2006/main">
+            <a:off x="647700" y="552450"/>
+            <a:ext cx="10477500" cy="914400"/>
+          </a:xfrm>
+          <a:prstGeom xmlns:a="http://schemas.openxmlformats.org/drawingml/2006/main" prst="rect">
+            <a:avLst/>
+          </a:prstGeom>
+          <a:noFill xmlns:a="http://schemas.openxmlformats.org/drawingml/2006/main"/>
+          <a:ln xmlns:a="http://schemas.openxmlformats.org/drawingml/2006/main" w="0">
+            <a:noFill/>
+          </a:ln>
+        </p:spPr>
+        <p:txBody>
+          <a:bodyPr xmlns:a="http://schemas.openxmlformats.org/drawingml/2006/main"/>
+          <a:lstStyle xmlns:a="http://schemas.openxmlformats.org/drawingml/2006/main">
+            <a:defPPr>
+              <a:defRPr sz="3300" b="1">
+                <a:solidFill>
+                  <a:srgbClr val="7409B7"/>
+                </a:solidFill>
+                <a:latin typeface="Arial"/>
+                <a:ea typeface="Arial"/>
+                <a:cs typeface="Arial"/>
+              </a:defRPr>
+            </a:defPPr>
+          </a:lstStyle>
+          <a:p xmlns:a="http://schemas.openxmlformats.org/drawingml/2006/main">
+            <a:pPr>
+              <a:defRPr sz="3300" b="1">
+                <a:solidFill>
+                  <a:srgbClr val="7409B7"/>
+                </a:solidFill>
+                <a:latin typeface="Arial"/>
+                <a:ea typeface="Arial"/>
+                <a:cs typeface="Arial"/>
+              </a:defRPr>
+            </a:pPr>
+            <a:r>
+              <a:rPr sz="3300" b="1">
+                <a:solidFill>
+                  <a:srgbClr val="7409B7"/>
+                </a:solidFill>
+                <a:latin typeface="Arial"/>
+                <a:ea typeface="Arial"/>
+                <a:cs typeface="Arial"/>
+              </a:rPr>
+              <a:t>Алдаа ба санал хүсэлт</a:t>
+            </a:r>
+          </a:p>
+        </p:txBody>
+      </p:sp>
+      <p:sp>
+        <p:nvSpPr>
+          <p:cNvPr id="2" name="">
+            <a:extLst xmlns:a="http://schemas.openxmlformats.org/drawingml/2006/main">
+              <a:ext uri="{FF2B5EF4-FFF2-40B4-BE49-F238E27FC236}">
+                <a16:creationId xmlns:a16="http://schemas.microsoft.com/office/drawing/2014/main" id="{28FC9B06-C328-4497-9F83-2BDB86244E47}"/>
               </a:ext>
             </a:extLst>
           </p:cNvPr>
@@ -6617,7 +8465,7 @@
           <p:cNvPr id="3" name="">
             <a:extLst xmlns:a="http://schemas.openxmlformats.org/drawingml/2006/main">
               <a:ext uri="{FF2B5EF4-FFF2-40B4-BE49-F238E27FC236}">
-                <a16:creationId xmlns:a16="http://schemas.microsoft.com/office/drawing/2014/main" id="{49DEE0AC-7520-47A9-B522-1F5DD599F1EB}"/>
+                <a16:creationId xmlns:a16="http://schemas.microsoft.com/office/drawing/2014/main" id="{2DEFA3CF-DC81-4442-A0A1-55DC5DE92D94}"/>
               </a:ext>
             </a:extLst>
           </p:cNvPr>
@@ -6683,7 +8531,7 @@
           <p:cNvPr id="4" name="">
             <a:extLst xmlns:a="http://schemas.openxmlformats.org/drawingml/2006/main">
               <a:ext uri="{FF2B5EF4-FFF2-40B4-BE49-F238E27FC236}">
-                <a16:creationId xmlns:a16="http://schemas.microsoft.com/office/drawing/2014/main" id="{523E3EA0-0C50-475C-8EF1-1E6B865605D8}"/>
+                <a16:creationId xmlns:a16="http://schemas.microsoft.com/office/drawing/2014/main" id="{9CA4C50B-EA12-4006-917F-6F3A45F4A0DD}"/>
               </a:ext>
             </a:extLst>
           </p:cNvPr>
@@ -6749,7 +8597,7 @@
           <p:cNvPr id="5" name="">
             <a:extLst xmlns:a="http://schemas.openxmlformats.org/drawingml/2006/main">
               <a:ext uri="{FF2B5EF4-FFF2-40B4-BE49-F238E27FC236}">
-                <a16:creationId xmlns:a16="http://schemas.microsoft.com/office/drawing/2014/main" id="{5798EB94-2C4D-4008-A62C-AAE9D0FF1062}"/>
+                <a16:creationId xmlns:a16="http://schemas.microsoft.com/office/drawing/2014/main" id="{EAB6EF55-B051-48B6-9081-EFA345AC8EAF}"/>
               </a:ext>
             </a:extLst>
           </p:cNvPr>
@@ -6815,7 +8663,7 @@
           <p:cNvPr id="6" name="">
             <a:extLst xmlns:a="http://schemas.openxmlformats.org/drawingml/2006/main">
               <a:ext uri="{FF2B5EF4-FFF2-40B4-BE49-F238E27FC236}">
-                <a16:creationId xmlns:a16="http://schemas.microsoft.com/office/drawing/2014/main" id="{259997FA-72F7-4CBB-8AE1-944F4D7F7D35}"/>
+                <a16:creationId xmlns:a16="http://schemas.microsoft.com/office/drawing/2014/main" id="{0070E932-ED4E-4E4A-A038-D3B560F6C635}"/>
               </a:ext>
             </a:extLst>
           </p:cNvPr>
@@ -6881,7 +8729,7 @@
           <p:cNvPr id="7" name="">
             <a:extLst xmlns:a="http://schemas.openxmlformats.org/drawingml/2006/main">
               <a:ext uri="{FF2B5EF4-FFF2-40B4-BE49-F238E27FC236}">
-                <a16:creationId xmlns:a16="http://schemas.microsoft.com/office/drawing/2014/main" id="{C88648A6-2A32-4E62-9E88-42347D845412}"/>
+                <a16:creationId xmlns:a16="http://schemas.microsoft.com/office/drawing/2014/main" id="{78992D53-27DC-43C4-B8F2-CF7A5C6D879E}"/>
               </a:ext>
             </a:extLst>
           </p:cNvPr>
@@ -6947,7 +8795,7 @@
           <p:cNvPr id="8" name="">
             <a:extLst xmlns:a="http://schemas.openxmlformats.org/drawingml/2006/main">
               <a:ext uri="{FF2B5EF4-FFF2-40B4-BE49-F238E27FC236}">
-                <a16:creationId xmlns:a16="http://schemas.microsoft.com/office/drawing/2014/main" id="{38371068-2CA6-4C68-B9B2-19C407617A13}"/>
+                <a16:creationId xmlns:a16="http://schemas.microsoft.com/office/drawing/2014/main" id="{204B468F-2A74-40A1-9D70-61D9548124B2}"/>
               </a:ext>
             </a:extLst>
           </p:cNvPr>
@@ -7036,7 +8884,7 @@
           <p:cNvPr id="9" name="">
             <a:extLst xmlns:a="http://schemas.openxmlformats.org/drawingml/2006/main">
               <a:ext uri="{FF2B5EF4-FFF2-40B4-BE49-F238E27FC236}">
-                <a16:creationId xmlns:a16="http://schemas.microsoft.com/office/drawing/2014/main" id="{8CEE393F-E1CB-4B3E-9476-9B1064DA209D}"/>
+                <a16:creationId xmlns:a16="http://schemas.microsoft.com/office/drawing/2014/main" id="{EC551788-81AC-4BF3-91A8-1145357C78BC}"/>
               </a:ext>
             </a:extLst>
           </p:cNvPr>
@@ -7100,7 +8948,7 @@
     </p:spTree>
     <p:extLst>
       <p:ext uri="{BB962C8B-B14F-4D97-AF65-F5344CB8AC3E}">
-        <p14:creationId xmlns:p14="http://schemas.microsoft.com/office/powerpoint/2010/main" val="1838448378"/>
+        <p14:creationId xmlns:p14="http://schemas.microsoft.com/office/powerpoint/2010/main" val="919638441"/>
       </p:ext>
     </p:extLst>
   </p:cSld>
